--- a/tutorial/T07/tut07.pptx
+++ b/tutorial/T07/tut07.pptx
@@ -5158,8 +5158,21 @@
                   <a:srgbClr val="FF0000"/>
                 </a:solidFill>
               </a:rPr>
-              <a:t> + 2</a:t>
-            </a:r>
+              <a:t> </a:t>
+            </a:r>
+            <a:r>
+              <a:rPr kumimoji="1" lang="en-US" altLang="zh-CN">
+                <a:solidFill>
+                  <a:srgbClr val="FF0000"/>
+                </a:solidFill>
+              </a:rPr>
+              <a:t>+ 3</a:t>
+            </a:r>
+            <a:endParaRPr kumimoji="1" lang="en-US" altLang="zh-CN" dirty="0">
+              <a:solidFill>
+                <a:srgbClr val="FF0000"/>
+              </a:solidFill>
+            </a:endParaRPr>
           </a:p>
           <a:p>
             <a:pPr marL="342900" indent="-342900">
@@ -6851,12 +6864,12 @@
           <a:effectLst/>
           <a:extLst>
             <a:ext uri="{909E8E84-426E-40dd-AFC4-6F175D3DCCD1}">
-              <a14:hiddenFill xmlns:a14="http://schemas.microsoft.com/office/drawing/2010/main" xmlns="">
+              <a14:hiddenFill xmlns="" xmlns:a14="http://schemas.microsoft.com/office/drawing/2010/main">
                 <a:noFill/>
               </a14:hiddenFill>
             </a:ext>
             <a:ext uri="{AF507438-7753-43e0-B8FC-AC1667EBCBE1}">
-              <a14:hiddenEffects xmlns:a14="http://schemas.microsoft.com/office/drawing/2010/main" xmlns="">
+              <a14:hiddenEffects xmlns="" xmlns:a14="http://schemas.microsoft.com/office/drawing/2010/main">
                 <a:effectLst>
                   <a:outerShdw blurRad="63500" dist="38099" dir="2700000" algn="ctr" rotWithShape="0">
                     <a:srgbClr val="000000">
@@ -6899,14 +6912,14 @@
           <a:effectLst/>
           <a:extLst>
             <a:ext uri="{909E8E84-426E-40dd-AFC4-6F175D3DCCD1}">
-              <a14:hiddenFill xmlns:a14="http://schemas.microsoft.com/office/drawing/2010/main" xmlns="">
+              <a14:hiddenFill xmlns="" xmlns:a14="http://schemas.microsoft.com/office/drawing/2010/main">
                 <a:solidFill>
                   <a:srgbClr val="FFFFFF"/>
                 </a:solidFill>
               </a14:hiddenFill>
             </a:ext>
             <a:ext uri="{91240B29-F687-4f45-9708-019B960494DF}">
-              <a14:hiddenLine xmlns:a14="http://schemas.microsoft.com/office/drawing/2010/main" xmlns="" w="9525">
+              <a14:hiddenLine xmlns="" xmlns:a14="http://schemas.microsoft.com/office/drawing/2010/main" w="9525">
                 <a:solidFill>
                   <a:schemeClr val="tx1"/>
                 </a:solidFill>
@@ -6916,7 +6929,7 @@
               </a14:hiddenLine>
             </a:ext>
             <a:ext uri="{AF507438-7753-43e0-B8FC-AC1667EBCBE1}">
-              <a14:hiddenEffects xmlns:a14="http://schemas.microsoft.com/office/drawing/2010/main" xmlns="">
+              <a14:hiddenEffects xmlns="" xmlns:a14="http://schemas.microsoft.com/office/drawing/2010/main">
                 <a:effectLst>
                   <a:outerShdw blurRad="63500" dist="38099" dir="2700000" algn="ctr" rotWithShape="0">
                     <a:srgbClr val="000000">
@@ -6979,7 +6992,7 @@
           <a:effectLst/>
           <a:extLst>
             <a:ext uri="{AF507438-7753-43e0-B8FC-AC1667EBCBE1}">
-              <a14:hiddenEffects xmlns:a14="http://schemas.microsoft.com/office/drawing/2010/main" xmlns="">
+              <a14:hiddenEffects xmlns="" xmlns:a14="http://schemas.microsoft.com/office/drawing/2010/main">
                 <a:effectLst>
                   <a:outerShdw blurRad="63500" dist="38099" dir="2700000" algn="ctr" rotWithShape="0">
                     <a:schemeClr val="bg2">
@@ -7037,12 +7050,12 @@
           <a:effectLst/>
           <a:extLst>
             <a:ext uri="{909E8E84-426E-40dd-AFC4-6F175D3DCCD1}">
-              <a14:hiddenFill xmlns:a14="http://schemas.microsoft.com/office/drawing/2010/main" xmlns="">
+              <a14:hiddenFill xmlns="" xmlns:a14="http://schemas.microsoft.com/office/drawing/2010/main">
                 <a:noFill/>
               </a14:hiddenFill>
             </a:ext>
             <a:ext uri="{AF507438-7753-43e0-B8FC-AC1667EBCBE1}">
-              <a14:hiddenEffects xmlns:a14="http://schemas.microsoft.com/office/drawing/2010/main" xmlns="">
+              <a14:hiddenEffects xmlns="" xmlns:a14="http://schemas.microsoft.com/office/drawing/2010/main">
                 <a:effectLst>
                   <a:outerShdw blurRad="63500" dist="38099" dir="2700000" algn="ctr" rotWithShape="0">
                     <a:srgbClr val="000000">
@@ -7090,12 +7103,12 @@
           <a:effectLst/>
           <a:extLst>
             <a:ext uri="{909E8E84-426E-40dd-AFC4-6F175D3DCCD1}">
-              <a14:hiddenFill xmlns:a14="http://schemas.microsoft.com/office/drawing/2010/main" xmlns="">
+              <a14:hiddenFill xmlns="" xmlns:a14="http://schemas.microsoft.com/office/drawing/2010/main">
                 <a:noFill/>
               </a14:hiddenFill>
             </a:ext>
             <a:ext uri="{AF507438-7753-43e0-B8FC-AC1667EBCBE1}">
-              <a14:hiddenEffects xmlns:a14="http://schemas.microsoft.com/office/drawing/2010/main" xmlns="">
+              <a14:hiddenEffects xmlns="" xmlns:a14="http://schemas.microsoft.com/office/drawing/2010/main">
                 <a:effectLst>
                   <a:outerShdw blurRad="63500" dist="38099" dir="2700000" algn="ctr" rotWithShape="0">
                     <a:srgbClr val="000000">
@@ -7138,14 +7151,14 @@
           <a:effectLst/>
           <a:extLst>
             <a:ext uri="{909E8E84-426E-40dd-AFC4-6F175D3DCCD1}">
-              <a14:hiddenFill xmlns:a14="http://schemas.microsoft.com/office/drawing/2010/main" xmlns="">
+              <a14:hiddenFill xmlns="" xmlns:a14="http://schemas.microsoft.com/office/drawing/2010/main">
                 <a:solidFill>
                   <a:srgbClr val="FFFFFF"/>
                 </a:solidFill>
               </a14:hiddenFill>
             </a:ext>
             <a:ext uri="{91240B29-F687-4f45-9708-019B960494DF}">
-              <a14:hiddenLine xmlns:a14="http://schemas.microsoft.com/office/drawing/2010/main" xmlns="" w="9525">
+              <a14:hiddenLine xmlns="" xmlns:a14="http://schemas.microsoft.com/office/drawing/2010/main" w="9525">
                 <a:solidFill>
                   <a:schemeClr val="tx1"/>
                 </a:solidFill>
@@ -7155,7 +7168,7 @@
               </a14:hiddenLine>
             </a:ext>
             <a:ext uri="{AF507438-7753-43e0-B8FC-AC1667EBCBE1}">
-              <a14:hiddenEffects xmlns:a14="http://schemas.microsoft.com/office/drawing/2010/main" xmlns="">
+              <a14:hiddenEffects xmlns="" xmlns:a14="http://schemas.microsoft.com/office/drawing/2010/main">
                 <a:effectLst>
                   <a:outerShdw blurRad="63500" dist="38099" dir="2700000" algn="ctr" rotWithShape="0">
                     <a:srgbClr val="000000">
@@ -7208,14 +7221,14 @@
           <a:effectLst/>
           <a:extLst>
             <a:ext uri="{909E8E84-426E-40dd-AFC4-6F175D3DCCD1}">
-              <a14:hiddenFill xmlns:a14="http://schemas.microsoft.com/office/drawing/2010/main" xmlns="">
+              <a14:hiddenFill xmlns="" xmlns:a14="http://schemas.microsoft.com/office/drawing/2010/main">
                 <a:solidFill>
                   <a:srgbClr val="FFFFFF"/>
                 </a:solidFill>
               </a14:hiddenFill>
             </a:ext>
             <a:ext uri="{91240B29-F687-4f45-9708-019B960494DF}">
-              <a14:hiddenLine xmlns:a14="http://schemas.microsoft.com/office/drawing/2010/main" xmlns="" w="9525">
+              <a14:hiddenLine xmlns="" xmlns:a14="http://schemas.microsoft.com/office/drawing/2010/main" w="9525">
                 <a:solidFill>
                   <a:schemeClr val="tx1"/>
                 </a:solidFill>
@@ -7225,7 +7238,7 @@
               </a14:hiddenLine>
             </a:ext>
             <a:ext uri="{AF507438-7753-43e0-B8FC-AC1667EBCBE1}">
-              <a14:hiddenEffects xmlns:a14="http://schemas.microsoft.com/office/drawing/2010/main" xmlns="">
+              <a14:hiddenEffects xmlns="" xmlns:a14="http://schemas.microsoft.com/office/drawing/2010/main">
                 <a:effectLst>
                   <a:outerShdw blurRad="63500" dist="38099" dir="2700000" algn="ctr" rotWithShape="0">
                     <a:srgbClr val="000000">
@@ -7278,14 +7291,14 @@
           <a:effectLst/>
           <a:extLst>
             <a:ext uri="{909E8E84-426E-40dd-AFC4-6F175D3DCCD1}">
-              <a14:hiddenFill xmlns:a14="http://schemas.microsoft.com/office/drawing/2010/main" xmlns="">
+              <a14:hiddenFill xmlns="" xmlns:a14="http://schemas.microsoft.com/office/drawing/2010/main">
                 <a:solidFill>
                   <a:schemeClr val="bg2"/>
                 </a:solidFill>
               </a14:hiddenFill>
             </a:ext>
             <a:ext uri="{91240B29-F687-4f45-9708-019B960494DF}">
-              <a14:hiddenLine xmlns:a14="http://schemas.microsoft.com/office/drawing/2010/main" xmlns="" w="12700">
+              <a14:hiddenLine xmlns="" xmlns:a14="http://schemas.microsoft.com/office/drawing/2010/main" w="12700">
                 <a:solidFill>
                   <a:schemeClr val="tx1"/>
                 </a:solidFill>
@@ -7295,7 +7308,7 @@
               </a14:hiddenLine>
             </a:ext>
             <a:ext uri="{AF507438-7753-43e0-B8FC-AC1667EBCBE1}">
-              <a14:hiddenEffects xmlns:a14="http://schemas.microsoft.com/office/drawing/2010/main" xmlns="">
+              <a14:hiddenEffects xmlns="" xmlns:a14="http://schemas.microsoft.com/office/drawing/2010/main">
                 <a:effectLst>
                   <a:outerShdw blurRad="63500" dist="38099" dir="2700000" algn="ctr" rotWithShape="0">
                     <a:schemeClr val="bg2">
@@ -7343,14 +7356,14 @@
           <a:effectLst/>
           <a:extLst>
             <a:ext uri="{909E8E84-426E-40dd-AFC4-6F175D3DCCD1}">
-              <a14:hiddenFill xmlns:a14="http://schemas.microsoft.com/office/drawing/2010/main" xmlns="">
+              <a14:hiddenFill xmlns="" xmlns:a14="http://schemas.microsoft.com/office/drawing/2010/main">
                 <a:solidFill>
                   <a:schemeClr val="bg2"/>
                 </a:solidFill>
               </a14:hiddenFill>
             </a:ext>
             <a:ext uri="{91240B29-F687-4f45-9708-019B960494DF}">
-              <a14:hiddenLine xmlns:a14="http://schemas.microsoft.com/office/drawing/2010/main" xmlns="" w="12700">
+              <a14:hiddenLine xmlns="" xmlns:a14="http://schemas.microsoft.com/office/drawing/2010/main" w="12700">
                 <a:solidFill>
                   <a:schemeClr val="tx1"/>
                 </a:solidFill>
@@ -7360,7 +7373,7 @@
               </a14:hiddenLine>
             </a:ext>
             <a:ext uri="{AF507438-7753-43e0-B8FC-AC1667EBCBE1}">
-              <a14:hiddenEffects xmlns:a14="http://schemas.microsoft.com/office/drawing/2010/main" xmlns="">
+              <a14:hiddenEffects xmlns="" xmlns:a14="http://schemas.microsoft.com/office/drawing/2010/main">
                 <a:effectLst>
                   <a:outerShdw blurRad="63500" dist="38099" dir="2700000" algn="ctr" rotWithShape="0">
                     <a:schemeClr val="bg2">
@@ -7429,12 +7442,12 @@
             <a:effectLst/>
             <a:extLst>
               <a:ext uri="{909E8E84-426E-40dd-AFC4-6F175D3DCCD1}">
-                <a14:hiddenFill xmlns:a14="http://schemas.microsoft.com/office/drawing/2010/main" xmlns="">
+                <a14:hiddenFill xmlns="" xmlns:a14="http://schemas.microsoft.com/office/drawing/2010/main">
                   <a:noFill/>
                 </a14:hiddenFill>
               </a:ext>
               <a:ext uri="{AF507438-7753-43e0-B8FC-AC1667EBCBE1}">
-                <a14:hiddenEffects xmlns:a14="http://schemas.microsoft.com/office/drawing/2010/main" xmlns="">
+                <a14:hiddenEffects xmlns="" xmlns:a14="http://schemas.microsoft.com/office/drawing/2010/main">
                   <a:effectLst>
                     <a:outerShdw blurRad="63500" dist="38099" dir="2700000" algn="ctr" rotWithShape="0">
                       <a:srgbClr val="000000">
@@ -7482,12 +7495,12 @@
             <a:effectLst/>
             <a:extLst>
               <a:ext uri="{909E8E84-426E-40dd-AFC4-6F175D3DCCD1}">
-                <a14:hiddenFill xmlns:a14="http://schemas.microsoft.com/office/drawing/2010/main" xmlns="">
+                <a14:hiddenFill xmlns="" xmlns:a14="http://schemas.microsoft.com/office/drawing/2010/main">
                   <a:noFill/>
                 </a14:hiddenFill>
               </a:ext>
               <a:ext uri="{AF507438-7753-43e0-B8FC-AC1667EBCBE1}">
-                <a14:hiddenEffects xmlns:a14="http://schemas.microsoft.com/office/drawing/2010/main" xmlns="">
+                <a14:hiddenEffects xmlns="" xmlns:a14="http://schemas.microsoft.com/office/drawing/2010/main">
                   <a:effectLst>
                     <a:outerShdw blurRad="63500" dist="38099" dir="2700000" algn="ctr" rotWithShape="0">
                       <a:srgbClr val="000000">
@@ -7535,12 +7548,12 @@
             <a:effectLst/>
             <a:extLst>
               <a:ext uri="{909E8E84-426E-40dd-AFC4-6F175D3DCCD1}">
-                <a14:hiddenFill xmlns:a14="http://schemas.microsoft.com/office/drawing/2010/main" xmlns="">
+                <a14:hiddenFill xmlns="" xmlns:a14="http://schemas.microsoft.com/office/drawing/2010/main">
                   <a:noFill/>
                 </a14:hiddenFill>
               </a:ext>
               <a:ext uri="{AF507438-7753-43e0-B8FC-AC1667EBCBE1}">
-                <a14:hiddenEffects xmlns:a14="http://schemas.microsoft.com/office/drawing/2010/main" xmlns="">
+                <a14:hiddenEffects xmlns="" xmlns:a14="http://schemas.microsoft.com/office/drawing/2010/main">
                   <a:effectLst>
                     <a:outerShdw blurRad="63500" dist="38099" dir="2700000" algn="ctr" rotWithShape="0">
                       <a:srgbClr val="000000">
@@ -7588,12 +7601,12 @@
             <a:effectLst/>
             <a:extLst>
               <a:ext uri="{909E8E84-426E-40dd-AFC4-6F175D3DCCD1}">
-                <a14:hiddenFill xmlns:a14="http://schemas.microsoft.com/office/drawing/2010/main" xmlns="">
+                <a14:hiddenFill xmlns="" xmlns:a14="http://schemas.microsoft.com/office/drawing/2010/main">
                   <a:noFill/>
                 </a14:hiddenFill>
               </a:ext>
               <a:ext uri="{AF507438-7753-43e0-B8FC-AC1667EBCBE1}">
-                <a14:hiddenEffects xmlns:a14="http://schemas.microsoft.com/office/drawing/2010/main" xmlns="">
+                <a14:hiddenEffects xmlns="" xmlns:a14="http://schemas.microsoft.com/office/drawing/2010/main">
                   <a:effectLst>
                     <a:outerShdw blurRad="63500" dist="38099" dir="2700000" algn="ctr" rotWithShape="0">
                       <a:srgbClr val="000000">
@@ -7641,12 +7654,12 @@
             <a:effectLst/>
             <a:extLst>
               <a:ext uri="{909E8E84-426E-40dd-AFC4-6F175D3DCCD1}">
-                <a14:hiddenFill xmlns:a14="http://schemas.microsoft.com/office/drawing/2010/main" xmlns="">
+                <a14:hiddenFill xmlns="" xmlns:a14="http://schemas.microsoft.com/office/drawing/2010/main">
                   <a:noFill/>
                 </a14:hiddenFill>
               </a:ext>
               <a:ext uri="{AF507438-7753-43e0-B8FC-AC1667EBCBE1}">
-                <a14:hiddenEffects xmlns:a14="http://schemas.microsoft.com/office/drawing/2010/main" xmlns="">
+                <a14:hiddenEffects xmlns="" xmlns:a14="http://schemas.microsoft.com/office/drawing/2010/main">
                   <a:effectLst>
                     <a:outerShdw blurRad="63500" dist="38099" dir="2700000" algn="ctr" rotWithShape="0">
                       <a:srgbClr val="000000">
@@ -7694,12 +7707,12 @@
             <a:effectLst/>
             <a:extLst>
               <a:ext uri="{909E8E84-426E-40dd-AFC4-6F175D3DCCD1}">
-                <a14:hiddenFill xmlns:a14="http://schemas.microsoft.com/office/drawing/2010/main" xmlns="">
+                <a14:hiddenFill xmlns="" xmlns:a14="http://schemas.microsoft.com/office/drawing/2010/main">
                   <a:noFill/>
                 </a14:hiddenFill>
               </a:ext>
               <a:ext uri="{AF507438-7753-43e0-B8FC-AC1667EBCBE1}">
-                <a14:hiddenEffects xmlns:a14="http://schemas.microsoft.com/office/drawing/2010/main" xmlns="">
+                <a14:hiddenEffects xmlns="" xmlns:a14="http://schemas.microsoft.com/office/drawing/2010/main">
                   <a:effectLst>
                     <a:outerShdw blurRad="63500" dist="38099" dir="2700000" algn="ctr" rotWithShape="0">
                       <a:srgbClr val="000000">
@@ -7747,12 +7760,12 @@
             <a:effectLst/>
             <a:extLst>
               <a:ext uri="{909E8E84-426E-40dd-AFC4-6F175D3DCCD1}">
-                <a14:hiddenFill xmlns:a14="http://schemas.microsoft.com/office/drawing/2010/main" xmlns="">
+                <a14:hiddenFill xmlns="" xmlns:a14="http://schemas.microsoft.com/office/drawing/2010/main">
                   <a:noFill/>
                 </a14:hiddenFill>
               </a:ext>
               <a:ext uri="{AF507438-7753-43e0-B8FC-AC1667EBCBE1}">
-                <a14:hiddenEffects xmlns:a14="http://schemas.microsoft.com/office/drawing/2010/main" xmlns="">
+                <a14:hiddenEffects xmlns="" xmlns:a14="http://schemas.microsoft.com/office/drawing/2010/main">
                   <a:effectLst>
                     <a:outerShdw blurRad="63500" dist="38099" dir="2700000" algn="ctr" rotWithShape="0">
                       <a:srgbClr val="000000">
@@ -7795,14 +7808,14 @@
             <a:effectLst/>
             <a:extLst>
               <a:ext uri="{909E8E84-426E-40dd-AFC4-6F175D3DCCD1}">
-                <a14:hiddenFill xmlns:a14="http://schemas.microsoft.com/office/drawing/2010/main" xmlns="">
+                <a14:hiddenFill xmlns="" xmlns:a14="http://schemas.microsoft.com/office/drawing/2010/main">
                   <a:solidFill>
                     <a:schemeClr val="accent1"/>
                   </a:solidFill>
                 </a14:hiddenFill>
               </a:ext>
               <a:ext uri="{91240B29-F687-4f45-9708-019B960494DF}">
-                <a14:hiddenLine xmlns:a14="http://schemas.microsoft.com/office/drawing/2010/main" xmlns="" w="9525">
+                <a14:hiddenLine xmlns="" xmlns:a14="http://schemas.microsoft.com/office/drawing/2010/main" w="9525">
                   <a:solidFill>
                     <a:schemeClr val="tx1"/>
                   </a:solidFill>
@@ -7812,7 +7825,7 @@
                 </a14:hiddenLine>
               </a:ext>
               <a:ext uri="{AF507438-7753-43e0-B8FC-AC1667EBCBE1}">
-                <a14:hiddenEffects xmlns:a14="http://schemas.microsoft.com/office/drawing/2010/main" xmlns="">
+                <a14:hiddenEffects xmlns="" xmlns:a14="http://schemas.microsoft.com/office/drawing/2010/main">
                   <a:effectLst>
                     <a:outerShdw blurRad="63500" dist="38099" dir="2700000" algn="ctr" rotWithShape="0">
                       <a:schemeClr val="bg2">
@@ -7969,14 +7982,14 @@
             <a:effectLst/>
             <a:extLst>
               <a:ext uri="{909E8E84-426E-40dd-AFC4-6F175D3DCCD1}">
-                <a14:hiddenFill xmlns:a14="http://schemas.microsoft.com/office/drawing/2010/main" xmlns="">
+                <a14:hiddenFill xmlns="" xmlns:a14="http://schemas.microsoft.com/office/drawing/2010/main">
                   <a:solidFill>
                     <a:schemeClr val="accent1"/>
                   </a:solidFill>
                 </a14:hiddenFill>
               </a:ext>
               <a:ext uri="{91240B29-F687-4f45-9708-019B960494DF}">
-                <a14:hiddenLine xmlns:a14="http://schemas.microsoft.com/office/drawing/2010/main" xmlns="" w="9525">
+                <a14:hiddenLine xmlns="" xmlns:a14="http://schemas.microsoft.com/office/drawing/2010/main" w="9525">
                   <a:solidFill>
                     <a:schemeClr val="tx1"/>
                   </a:solidFill>
@@ -7986,7 +7999,7 @@
                 </a14:hiddenLine>
               </a:ext>
               <a:ext uri="{AF507438-7753-43e0-B8FC-AC1667EBCBE1}">
-                <a14:hiddenEffects xmlns:a14="http://schemas.microsoft.com/office/drawing/2010/main" xmlns="">
+                <a14:hiddenEffects xmlns="" xmlns:a14="http://schemas.microsoft.com/office/drawing/2010/main">
                   <a:effectLst>
                     <a:outerShdw blurRad="63500" dist="38099" dir="2700000" algn="ctr" rotWithShape="0">
                       <a:schemeClr val="bg2">
@@ -8143,14 +8156,14 @@
             <a:effectLst/>
             <a:extLst>
               <a:ext uri="{909E8E84-426E-40dd-AFC4-6F175D3DCCD1}">
-                <a14:hiddenFill xmlns:a14="http://schemas.microsoft.com/office/drawing/2010/main" xmlns="">
+                <a14:hiddenFill xmlns="" xmlns:a14="http://schemas.microsoft.com/office/drawing/2010/main">
                   <a:solidFill>
                     <a:schemeClr val="accent1"/>
                   </a:solidFill>
                 </a14:hiddenFill>
               </a:ext>
               <a:ext uri="{91240B29-F687-4f45-9708-019B960494DF}">
-                <a14:hiddenLine xmlns:a14="http://schemas.microsoft.com/office/drawing/2010/main" xmlns="" w="9525">
+                <a14:hiddenLine xmlns="" xmlns:a14="http://schemas.microsoft.com/office/drawing/2010/main" w="9525">
                   <a:solidFill>
                     <a:schemeClr val="tx1"/>
                   </a:solidFill>
@@ -8160,7 +8173,7 @@
                 </a14:hiddenLine>
               </a:ext>
               <a:ext uri="{AF507438-7753-43e0-B8FC-AC1667EBCBE1}">
-                <a14:hiddenEffects xmlns:a14="http://schemas.microsoft.com/office/drawing/2010/main" xmlns="">
+                <a14:hiddenEffects xmlns="" xmlns:a14="http://schemas.microsoft.com/office/drawing/2010/main">
                   <a:effectLst>
                     <a:outerShdw blurRad="63500" dist="38099" dir="2700000" algn="ctr" rotWithShape="0">
                       <a:schemeClr val="bg2">
@@ -8317,14 +8330,14 @@
             <a:effectLst/>
             <a:extLst>
               <a:ext uri="{909E8E84-426E-40dd-AFC4-6F175D3DCCD1}">
-                <a14:hiddenFill xmlns:a14="http://schemas.microsoft.com/office/drawing/2010/main" xmlns="">
+                <a14:hiddenFill xmlns="" xmlns:a14="http://schemas.microsoft.com/office/drawing/2010/main">
                   <a:solidFill>
                     <a:schemeClr val="accent1"/>
                   </a:solidFill>
                 </a14:hiddenFill>
               </a:ext>
               <a:ext uri="{91240B29-F687-4f45-9708-019B960494DF}">
-                <a14:hiddenLine xmlns:a14="http://schemas.microsoft.com/office/drawing/2010/main" xmlns="" w="9525">
+                <a14:hiddenLine xmlns="" xmlns:a14="http://schemas.microsoft.com/office/drawing/2010/main" w="9525">
                   <a:solidFill>
                     <a:schemeClr val="tx1"/>
                   </a:solidFill>
@@ -8334,7 +8347,7 @@
                 </a14:hiddenLine>
               </a:ext>
               <a:ext uri="{AF507438-7753-43e0-B8FC-AC1667EBCBE1}">
-                <a14:hiddenEffects xmlns:a14="http://schemas.microsoft.com/office/drawing/2010/main" xmlns="">
+                <a14:hiddenEffects xmlns="" xmlns:a14="http://schemas.microsoft.com/office/drawing/2010/main">
                   <a:effectLst>
                     <a:outerShdw blurRad="63500" dist="38099" dir="2700000" algn="ctr" rotWithShape="0">
                       <a:schemeClr val="bg2">
@@ -8491,14 +8504,14 @@
             <a:effectLst/>
             <a:extLst>
               <a:ext uri="{909E8E84-426E-40dd-AFC4-6F175D3DCCD1}">
-                <a14:hiddenFill xmlns:a14="http://schemas.microsoft.com/office/drawing/2010/main" xmlns="">
+                <a14:hiddenFill xmlns="" xmlns:a14="http://schemas.microsoft.com/office/drawing/2010/main">
                   <a:solidFill>
                     <a:schemeClr val="accent1"/>
                   </a:solidFill>
                 </a14:hiddenFill>
               </a:ext>
               <a:ext uri="{91240B29-F687-4f45-9708-019B960494DF}">
-                <a14:hiddenLine xmlns:a14="http://schemas.microsoft.com/office/drawing/2010/main" xmlns="" w="9525">
+                <a14:hiddenLine xmlns="" xmlns:a14="http://schemas.microsoft.com/office/drawing/2010/main" w="9525">
                   <a:solidFill>
                     <a:schemeClr val="tx1"/>
                   </a:solidFill>
@@ -8508,7 +8521,7 @@
                 </a14:hiddenLine>
               </a:ext>
               <a:ext uri="{AF507438-7753-43e0-B8FC-AC1667EBCBE1}">
-                <a14:hiddenEffects xmlns:a14="http://schemas.microsoft.com/office/drawing/2010/main" xmlns="">
+                <a14:hiddenEffects xmlns="" xmlns:a14="http://schemas.microsoft.com/office/drawing/2010/main">
                   <a:effectLst>
                     <a:outerShdw blurRad="63500" dist="38099" dir="2700000" algn="ctr" rotWithShape="0">
                       <a:schemeClr val="bg2">
@@ -8670,12 +8683,12 @@
             <a:effectLst/>
             <a:extLst>
               <a:ext uri="{909E8E84-426E-40dd-AFC4-6F175D3DCCD1}">
-                <a14:hiddenFill xmlns:a14="http://schemas.microsoft.com/office/drawing/2010/main" xmlns="">
+                <a14:hiddenFill xmlns="" xmlns:a14="http://schemas.microsoft.com/office/drawing/2010/main">
                   <a:noFill/>
                 </a14:hiddenFill>
               </a:ext>
               <a:ext uri="{AF507438-7753-43e0-B8FC-AC1667EBCBE1}">
-                <a14:hiddenEffects xmlns:a14="http://schemas.microsoft.com/office/drawing/2010/main" xmlns="">
+                <a14:hiddenEffects xmlns="" xmlns:a14="http://schemas.microsoft.com/office/drawing/2010/main">
                   <a:effectLst>
                     <a:outerShdw blurRad="63500" dist="38099" dir="2700000" algn="ctr" rotWithShape="0">
                       <a:schemeClr val="bg2">
@@ -8725,12 +8738,12 @@
             <a:effectLst/>
             <a:extLst>
               <a:ext uri="{909E8E84-426E-40dd-AFC4-6F175D3DCCD1}">
-                <a14:hiddenFill xmlns:a14="http://schemas.microsoft.com/office/drawing/2010/main" xmlns="">
+                <a14:hiddenFill xmlns="" xmlns:a14="http://schemas.microsoft.com/office/drawing/2010/main">
                   <a:noFill/>
                 </a14:hiddenFill>
               </a:ext>
               <a:ext uri="{AF507438-7753-43e0-B8FC-AC1667EBCBE1}">
-                <a14:hiddenEffects xmlns:a14="http://schemas.microsoft.com/office/drawing/2010/main" xmlns="">
+                <a14:hiddenEffects xmlns="" xmlns:a14="http://schemas.microsoft.com/office/drawing/2010/main">
                   <a:effectLst>
                     <a:outerShdw blurRad="63500" dist="38099" dir="2700000" algn="ctr" rotWithShape="0">
                       <a:schemeClr val="bg2">
@@ -8797,12 +8810,12 @@
             <a:effectLst/>
             <a:extLst>
               <a:ext uri="{909E8E84-426E-40dd-AFC4-6F175D3DCCD1}">
-                <a14:hiddenFill xmlns:a14="http://schemas.microsoft.com/office/drawing/2010/main" xmlns="">
+                <a14:hiddenFill xmlns="" xmlns:a14="http://schemas.microsoft.com/office/drawing/2010/main">
                   <a:noFill/>
                 </a14:hiddenFill>
               </a:ext>
               <a:ext uri="{AF507438-7753-43e0-B8FC-AC1667EBCBE1}">
-                <a14:hiddenEffects xmlns:a14="http://schemas.microsoft.com/office/drawing/2010/main" xmlns="">
+                <a14:hiddenEffects xmlns="" xmlns:a14="http://schemas.microsoft.com/office/drawing/2010/main">
                   <a:effectLst>
                     <a:outerShdw blurRad="63500" dist="38099" dir="2700000" algn="ctr" rotWithShape="0">
                       <a:schemeClr val="bg2">
@@ -8850,12 +8863,12 @@
             <a:effectLst/>
             <a:extLst>
               <a:ext uri="{909E8E84-426E-40dd-AFC4-6F175D3DCCD1}">
-                <a14:hiddenFill xmlns:a14="http://schemas.microsoft.com/office/drawing/2010/main" xmlns="">
+                <a14:hiddenFill xmlns="" xmlns:a14="http://schemas.microsoft.com/office/drawing/2010/main">
                   <a:noFill/>
                 </a14:hiddenFill>
               </a:ext>
               <a:ext uri="{AF507438-7753-43e0-B8FC-AC1667EBCBE1}">
-                <a14:hiddenEffects xmlns:a14="http://schemas.microsoft.com/office/drawing/2010/main" xmlns="">
+                <a14:hiddenEffects xmlns="" xmlns:a14="http://schemas.microsoft.com/office/drawing/2010/main">
                   <a:effectLst>
                     <a:outerShdw blurRad="63500" dist="38099" dir="2700000" algn="ctr" rotWithShape="0">
                       <a:schemeClr val="bg2">
@@ -8903,12 +8916,12 @@
             <a:effectLst/>
             <a:extLst>
               <a:ext uri="{909E8E84-426E-40dd-AFC4-6F175D3DCCD1}">
-                <a14:hiddenFill xmlns:a14="http://schemas.microsoft.com/office/drawing/2010/main" xmlns="">
+                <a14:hiddenFill xmlns="" xmlns:a14="http://schemas.microsoft.com/office/drawing/2010/main">
                   <a:noFill/>
                 </a14:hiddenFill>
               </a:ext>
               <a:ext uri="{AF507438-7753-43e0-B8FC-AC1667EBCBE1}">
-                <a14:hiddenEffects xmlns:a14="http://schemas.microsoft.com/office/drawing/2010/main" xmlns="">
+                <a14:hiddenEffects xmlns="" xmlns:a14="http://schemas.microsoft.com/office/drawing/2010/main">
                   <a:effectLst>
                     <a:outerShdw blurRad="63500" dist="38099" dir="2700000" algn="ctr" rotWithShape="0">
                       <a:schemeClr val="bg2">
@@ -8951,14 +8964,14 @@
             <a:effectLst/>
             <a:extLst>
               <a:ext uri="{909E8E84-426E-40dd-AFC4-6F175D3DCCD1}">
-                <a14:hiddenFill xmlns:a14="http://schemas.microsoft.com/office/drawing/2010/main" xmlns="">
+                <a14:hiddenFill xmlns="" xmlns:a14="http://schemas.microsoft.com/office/drawing/2010/main">
                   <a:solidFill>
                     <a:schemeClr val="accent1"/>
                   </a:solidFill>
                 </a14:hiddenFill>
               </a:ext>
               <a:ext uri="{91240B29-F687-4f45-9708-019B960494DF}">
-                <a14:hiddenLine xmlns:a14="http://schemas.microsoft.com/office/drawing/2010/main" xmlns="" w="9525">
+                <a14:hiddenLine xmlns="" xmlns:a14="http://schemas.microsoft.com/office/drawing/2010/main" w="9525">
                   <a:solidFill>
                     <a:schemeClr val="tx1"/>
                   </a:solidFill>
@@ -8968,7 +8981,7 @@
                 </a14:hiddenLine>
               </a:ext>
               <a:ext uri="{AF507438-7753-43e0-B8FC-AC1667EBCBE1}">
-                <a14:hiddenEffects xmlns:a14="http://schemas.microsoft.com/office/drawing/2010/main" xmlns="">
+                <a14:hiddenEffects xmlns="" xmlns:a14="http://schemas.microsoft.com/office/drawing/2010/main">
                   <a:effectLst>
                     <a:outerShdw blurRad="63500" dist="38099" dir="2700000" algn="ctr" rotWithShape="0">
                       <a:schemeClr val="bg2">
@@ -9162,12 +9175,12 @@
             <a:effectLst/>
             <a:extLst>
               <a:ext uri="{909E8E84-426E-40dd-AFC4-6F175D3DCCD1}">
-                <a14:hiddenFill xmlns:a14="http://schemas.microsoft.com/office/drawing/2010/main" xmlns="">
+                <a14:hiddenFill xmlns="" xmlns:a14="http://schemas.microsoft.com/office/drawing/2010/main">
                   <a:noFill/>
                 </a14:hiddenFill>
               </a:ext>
               <a:ext uri="{AF507438-7753-43e0-B8FC-AC1667EBCBE1}">
-                <a14:hiddenEffects xmlns:a14="http://schemas.microsoft.com/office/drawing/2010/main" xmlns="">
+                <a14:hiddenEffects xmlns="" xmlns:a14="http://schemas.microsoft.com/office/drawing/2010/main">
                   <a:effectLst>
                     <a:outerShdw blurRad="63500" dist="38099" dir="2700000" algn="ctr" rotWithShape="0">
                       <a:srgbClr val="000000">
@@ -9215,12 +9228,12 @@
             <a:effectLst/>
             <a:extLst>
               <a:ext uri="{909E8E84-426E-40dd-AFC4-6F175D3DCCD1}">
-                <a14:hiddenFill xmlns:a14="http://schemas.microsoft.com/office/drawing/2010/main" xmlns="">
+                <a14:hiddenFill xmlns="" xmlns:a14="http://schemas.microsoft.com/office/drawing/2010/main">
                   <a:noFill/>
                 </a14:hiddenFill>
               </a:ext>
               <a:ext uri="{AF507438-7753-43e0-B8FC-AC1667EBCBE1}">
-                <a14:hiddenEffects xmlns:a14="http://schemas.microsoft.com/office/drawing/2010/main" xmlns="">
+                <a14:hiddenEffects xmlns="" xmlns:a14="http://schemas.microsoft.com/office/drawing/2010/main">
                   <a:effectLst>
                     <a:outerShdw blurRad="63500" dist="38099" dir="2700000" algn="ctr" rotWithShape="0">
                       <a:srgbClr val="000000">
@@ -9263,14 +9276,14 @@
             <a:effectLst/>
             <a:extLst>
               <a:ext uri="{909E8E84-426E-40dd-AFC4-6F175D3DCCD1}">
-                <a14:hiddenFill xmlns:a14="http://schemas.microsoft.com/office/drawing/2010/main" xmlns="">
+                <a14:hiddenFill xmlns="" xmlns:a14="http://schemas.microsoft.com/office/drawing/2010/main">
                   <a:solidFill>
                     <a:schemeClr val="accent1"/>
                   </a:solidFill>
                 </a14:hiddenFill>
               </a:ext>
               <a:ext uri="{91240B29-F687-4f45-9708-019B960494DF}">
-                <a14:hiddenLine xmlns:a14="http://schemas.microsoft.com/office/drawing/2010/main" xmlns="" w="9525">
+                <a14:hiddenLine xmlns="" xmlns:a14="http://schemas.microsoft.com/office/drawing/2010/main" w="9525">
                   <a:solidFill>
                     <a:schemeClr val="tx1"/>
                   </a:solidFill>
@@ -9280,7 +9293,7 @@
                 </a14:hiddenLine>
               </a:ext>
               <a:ext uri="{AF507438-7753-43e0-B8FC-AC1667EBCBE1}">
-                <a14:hiddenEffects xmlns:a14="http://schemas.microsoft.com/office/drawing/2010/main" xmlns="">
+                <a14:hiddenEffects xmlns="" xmlns:a14="http://schemas.microsoft.com/office/drawing/2010/main">
                   <a:effectLst>
                     <a:outerShdw blurRad="63500" dist="38099" dir="2700000" algn="ctr" rotWithShape="0">
                       <a:schemeClr val="bg2">
@@ -9452,14 +9465,14 @@
             <a:effectLst/>
             <a:extLst>
               <a:ext uri="{909E8E84-426E-40dd-AFC4-6F175D3DCCD1}">
-                <a14:hiddenFill xmlns:a14="http://schemas.microsoft.com/office/drawing/2010/main" xmlns="">
+                <a14:hiddenFill xmlns="" xmlns:a14="http://schemas.microsoft.com/office/drawing/2010/main">
                   <a:solidFill>
                     <a:schemeClr val="accent1"/>
                   </a:solidFill>
                 </a14:hiddenFill>
               </a:ext>
               <a:ext uri="{91240B29-F687-4f45-9708-019B960494DF}">
-                <a14:hiddenLine xmlns:a14="http://schemas.microsoft.com/office/drawing/2010/main" xmlns="" w="9525">
+                <a14:hiddenLine xmlns="" xmlns:a14="http://schemas.microsoft.com/office/drawing/2010/main" w="9525">
                   <a:solidFill>
                     <a:schemeClr val="tx1"/>
                   </a:solidFill>
@@ -9469,7 +9482,7 @@
                 </a14:hiddenLine>
               </a:ext>
               <a:ext uri="{AF507438-7753-43e0-B8FC-AC1667EBCBE1}">
-                <a14:hiddenEffects xmlns:a14="http://schemas.microsoft.com/office/drawing/2010/main" xmlns="">
+                <a14:hiddenEffects xmlns="" xmlns:a14="http://schemas.microsoft.com/office/drawing/2010/main">
                   <a:effectLst>
                     <a:outerShdw blurRad="63500" dist="38099" dir="2700000" algn="ctr" rotWithShape="0">
                       <a:schemeClr val="bg2">
@@ -9626,14 +9639,14 @@
             <a:effectLst/>
             <a:extLst>
               <a:ext uri="{909E8E84-426E-40dd-AFC4-6F175D3DCCD1}">
-                <a14:hiddenFill xmlns:a14="http://schemas.microsoft.com/office/drawing/2010/main" xmlns="">
+                <a14:hiddenFill xmlns="" xmlns:a14="http://schemas.microsoft.com/office/drawing/2010/main">
                   <a:solidFill>
                     <a:schemeClr val="accent1"/>
                   </a:solidFill>
                 </a14:hiddenFill>
               </a:ext>
               <a:ext uri="{91240B29-F687-4f45-9708-019B960494DF}">
-                <a14:hiddenLine xmlns:a14="http://schemas.microsoft.com/office/drawing/2010/main" xmlns="" w="9525">
+                <a14:hiddenLine xmlns="" xmlns:a14="http://schemas.microsoft.com/office/drawing/2010/main" w="9525">
                   <a:solidFill>
                     <a:schemeClr val="tx1"/>
                   </a:solidFill>
@@ -9643,7 +9656,7 @@
                 </a14:hiddenLine>
               </a:ext>
               <a:ext uri="{AF507438-7753-43e0-B8FC-AC1667EBCBE1}">
-                <a14:hiddenEffects xmlns:a14="http://schemas.microsoft.com/office/drawing/2010/main" xmlns="">
+                <a14:hiddenEffects xmlns="" xmlns:a14="http://schemas.microsoft.com/office/drawing/2010/main">
                   <a:effectLst>
                     <a:outerShdw blurRad="63500" dist="38099" dir="2700000" algn="ctr" rotWithShape="0">
                       <a:schemeClr val="bg2">
@@ -9800,14 +9813,14 @@
             <a:effectLst/>
             <a:extLst>
               <a:ext uri="{909E8E84-426E-40dd-AFC4-6F175D3DCCD1}">
-                <a14:hiddenFill xmlns:a14="http://schemas.microsoft.com/office/drawing/2010/main" xmlns="">
+                <a14:hiddenFill xmlns="" xmlns:a14="http://schemas.microsoft.com/office/drawing/2010/main">
                   <a:solidFill>
                     <a:schemeClr val="accent1"/>
                   </a:solidFill>
                 </a14:hiddenFill>
               </a:ext>
               <a:ext uri="{91240B29-F687-4f45-9708-019B960494DF}">
-                <a14:hiddenLine xmlns:a14="http://schemas.microsoft.com/office/drawing/2010/main" xmlns="" w="9525">
+                <a14:hiddenLine xmlns="" xmlns:a14="http://schemas.microsoft.com/office/drawing/2010/main" w="9525">
                   <a:solidFill>
                     <a:schemeClr val="tx1"/>
                   </a:solidFill>
@@ -9817,7 +9830,7 @@
                 </a14:hiddenLine>
               </a:ext>
               <a:ext uri="{AF507438-7753-43e0-B8FC-AC1667EBCBE1}">
-                <a14:hiddenEffects xmlns:a14="http://schemas.microsoft.com/office/drawing/2010/main" xmlns="">
+                <a14:hiddenEffects xmlns="" xmlns:a14="http://schemas.microsoft.com/office/drawing/2010/main">
                   <a:effectLst>
                     <a:outerShdw blurRad="63500" dist="38099" dir="2700000" algn="ctr" rotWithShape="0">
                       <a:schemeClr val="bg2">
@@ -9979,12 +9992,12 @@
             <a:effectLst/>
             <a:extLst>
               <a:ext uri="{909E8E84-426E-40dd-AFC4-6F175D3DCCD1}">
-                <a14:hiddenFill xmlns:a14="http://schemas.microsoft.com/office/drawing/2010/main" xmlns="">
+                <a14:hiddenFill xmlns="" xmlns:a14="http://schemas.microsoft.com/office/drawing/2010/main">
                   <a:noFill/>
                 </a14:hiddenFill>
               </a:ext>
               <a:ext uri="{AF507438-7753-43e0-B8FC-AC1667EBCBE1}">
-                <a14:hiddenEffects xmlns:a14="http://schemas.microsoft.com/office/drawing/2010/main" xmlns="">
+                <a14:hiddenEffects xmlns="" xmlns:a14="http://schemas.microsoft.com/office/drawing/2010/main">
                   <a:effectLst>
                     <a:outerShdw blurRad="63500" dist="38099" dir="2700000" algn="ctr" rotWithShape="0">
                       <a:srgbClr val="000000">
@@ -10032,12 +10045,12 @@
             <a:effectLst/>
             <a:extLst>
               <a:ext uri="{909E8E84-426E-40dd-AFC4-6F175D3DCCD1}">
-                <a14:hiddenFill xmlns:a14="http://schemas.microsoft.com/office/drawing/2010/main" xmlns="">
+                <a14:hiddenFill xmlns="" xmlns:a14="http://schemas.microsoft.com/office/drawing/2010/main">
                   <a:noFill/>
                 </a14:hiddenFill>
               </a:ext>
               <a:ext uri="{AF507438-7753-43e0-B8FC-AC1667EBCBE1}">
-                <a14:hiddenEffects xmlns:a14="http://schemas.microsoft.com/office/drawing/2010/main" xmlns="">
+                <a14:hiddenEffects xmlns="" xmlns:a14="http://schemas.microsoft.com/office/drawing/2010/main">
                   <a:effectLst>
                     <a:outerShdw blurRad="63500" dist="38099" dir="2700000" algn="ctr" rotWithShape="0">
                       <a:srgbClr val="000000">
@@ -10085,12 +10098,12 @@
             <a:effectLst/>
             <a:extLst>
               <a:ext uri="{909E8E84-426E-40dd-AFC4-6F175D3DCCD1}">
-                <a14:hiddenFill xmlns:a14="http://schemas.microsoft.com/office/drawing/2010/main" xmlns="">
+                <a14:hiddenFill xmlns="" xmlns:a14="http://schemas.microsoft.com/office/drawing/2010/main">
                   <a:noFill/>
                 </a14:hiddenFill>
               </a:ext>
               <a:ext uri="{AF507438-7753-43e0-B8FC-AC1667EBCBE1}">
-                <a14:hiddenEffects xmlns:a14="http://schemas.microsoft.com/office/drawing/2010/main" xmlns="">
+                <a14:hiddenEffects xmlns="" xmlns:a14="http://schemas.microsoft.com/office/drawing/2010/main">
                   <a:effectLst>
                     <a:outerShdw blurRad="63500" dist="38099" dir="2700000" algn="ctr" rotWithShape="0">
                       <a:srgbClr val="000000">
@@ -10551,7 +10564,7 @@
           <a:effectLst/>
           <a:extLst>
             <a:ext uri="{AF507438-7753-43e0-B8FC-AC1667EBCBE1}">
-              <a14:hiddenEffects xmlns:a14="http://schemas.microsoft.com/office/drawing/2010/main" xmlns="">
+              <a14:hiddenEffects xmlns="" xmlns:a14="http://schemas.microsoft.com/office/drawing/2010/main">
                 <a:effectLst>
                   <a:outerShdw blurRad="63500" dist="38099" dir="2700000" algn="ctr" rotWithShape="0">
                     <a:schemeClr val="bg2">
@@ -10609,12 +10622,12 @@
           <a:effectLst/>
           <a:extLst>
             <a:ext uri="{909E8E84-426E-40dd-AFC4-6F175D3DCCD1}">
-              <a14:hiddenFill xmlns:a14="http://schemas.microsoft.com/office/drawing/2010/main" xmlns="">
+              <a14:hiddenFill xmlns="" xmlns:a14="http://schemas.microsoft.com/office/drawing/2010/main">
                 <a:noFill/>
               </a14:hiddenFill>
             </a:ext>
             <a:ext uri="{AF507438-7753-43e0-B8FC-AC1667EBCBE1}">
-              <a14:hiddenEffects xmlns:a14="http://schemas.microsoft.com/office/drawing/2010/main" xmlns="">
+              <a14:hiddenEffects xmlns="" xmlns:a14="http://schemas.microsoft.com/office/drawing/2010/main">
                 <a:effectLst>
                   <a:outerShdw blurRad="63500" dist="38099" dir="2700000" algn="ctr" rotWithShape="0">
                     <a:srgbClr val="000000">
@@ -10662,12 +10675,12 @@
           <a:effectLst/>
           <a:extLst>
             <a:ext uri="{909E8E84-426E-40dd-AFC4-6F175D3DCCD1}">
-              <a14:hiddenFill xmlns:a14="http://schemas.microsoft.com/office/drawing/2010/main" xmlns="">
+              <a14:hiddenFill xmlns="" xmlns:a14="http://schemas.microsoft.com/office/drawing/2010/main">
                 <a:noFill/>
               </a14:hiddenFill>
             </a:ext>
             <a:ext uri="{AF507438-7753-43e0-B8FC-AC1667EBCBE1}">
-              <a14:hiddenEffects xmlns:a14="http://schemas.microsoft.com/office/drawing/2010/main" xmlns="">
+              <a14:hiddenEffects xmlns="" xmlns:a14="http://schemas.microsoft.com/office/drawing/2010/main">
                 <a:effectLst>
                   <a:outerShdw blurRad="63500" dist="38099" dir="2700000" algn="ctr" rotWithShape="0">
                     <a:srgbClr val="000000">
@@ -10715,12 +10728,12 @@
           <a:effectLst/>
           <a:extLst>
             <a:ext uri="{909E8E84-426E-40dd-AFC4-6F175D3DCCD1}">
-              <a14:hiddenFill xmlns:a14="http://schemas.microsoft.com/office/drawing/2010/main" xmlns="">
+              <a14:hiddenFill xmlns="" xmlns:a14="http://schemas.microsoft.com/office/drawing/2010/main">
                 <a:noFill/>
               </a14:hiddenFill>
             </a:ext>
             <a:ext uri="{AF507438-7753-43e0-B8FC-AC1667EBCBE1}">
-              <a14:hiddenEffects xmlns:a14="http://schemas.microsoft.com/office/drawing/2010/main" xmlns="">
+              <a14:hiddenEffects xmlns="" xmlns:a14="http://schemas.microsoft.com/office/drawing/2010/main">
                 <a:effectLst>
                   <a:outerShdw blurRad="63500" dist="38099" dir="2700000" algn="ctr" rotWithShape="0">
                     <a:srgbClr val="000000">
@@ -10768,12 +10781,12 @@
           <a:effectLst/>
           <a:extLst>
             <a:ext uri="{909E8E84-426E-40dd-AFC4-6F175D3DCCD1}">
-              <a14:hiddenFill xmlns:a14="http://schemas.microsoft.com/office/drawing/2010/main" xmlns="">
+              <a14:hiddenFill xmlns="" xmlns:a14="http://schemas.microsoft.com/office/drawing/2010/main">
                 <a:noFill/>
               </a14:hiddenFill>
             </a:ext>
             <a:ext uri="{AF507438-7753-43e0-B8FC-AC1667EBCBE1}">
-              <a14:hiddenEffects xmlns:a14="http://schemas.microsoft.com/office/drawing/2010/main" xmlns="">
+              <a14:hiddenEffects xmlns="" xmlns:a14="http://schemas.microsoft.com/office/drawing/2010/main">
                 <a:effectLst>
                   <a:outerShdw blurRad="63500" dist="38099" dir="2700000" algn="ctr" rotWithShape="0">
                     <a:srgbClr val="000000">
@@ -10821,12 +10834,12 @@
           <a:effectLst/>
           <a:extLst>
             <a:ext uri="{909E8E84-426E-40dd-AFC4-6F175D3DCCD1}">
-              <a14:hiddenFill xmlns:a14="http://schemas.microsoft.com/office/drawing/2010/main" xmlns="">
+              <a14:hiddenFill xmlns="" xmlns:a14="http://schemas.microsoft.com/office/drawing/2010/main">
                 <a:noFill/>
               </a14:hiddenFill>
             </a:ext>
             <a:ext uri="{AF507438-7753-43e0-B8FC-AC1667EBCBE1}">
-              <a14:hiddenEffects xmlns:a14="http://schemas.microsoft.com/office/drawing/2010/main" xmlns="">
+              <a14:hiddenEffects xmlns="" xmlns:a14="http://schemas.microsoft.com/office/drawing/2010/main">
                 <a:effectLst>
                   <a:outerShdw blurRad="63500" dist="38099" dir="2700000" algn="ctr" rotWithShape="0">
                     <a:srgbClr val="000000">
@@ -10874,12 +10887,12 @@
           <a:effectLst/>
           <a:extLst>
             <a:ext uri="{909E8E84-426E-40dd-AFC4-6F175D3DCCD1}">
-              <a14:hiddenFill xmlns:a14="http://schemas.microsoft.com/office/drawing/2010/main" xmlns="">
+              <a14:hiddenFill xmlns="" xmlns:a14="http://schemas.microsoft.com/office/drawing/2010/main">
                 <a:noFill/>
               </a14:hiddenFill>
             </a:ext>
             <a:ext uri="{AF507438-7753-43e0-B8FC-AC1667EBCBE1}">
-              <a14:hiddenEffects xmlns:a14="http://schemas.microsoft.com/office/drawing/2010/main" xmlns="">
+              <a14:hiddenEffects xmlns="" xmlns:a14="http://schemas.microsoft.com/office/drawing/2010/main">
                 <a:effectLst>
                   <a:outerShdw blurRad="63500" dist="38099" dir="2700000" algn="ctr" rotWithShape="0">
                     <a:srgbClr val="000000">
@@ -10927,12 +10940,12 @@
           <a:effectLst/>
           <a:extLst>
             <a:ext uri="{909E8E84-426E-40dd-AFC4-6F175D3DCCD1}">
-              <a14:hiddenFill xmlns:a14="http://schemas.microsoft.com/office/drawing/2010/main" xmlns="">
+              <a14:hiddenFill xmlns="" xmlns:a14="http://schemas.microsoft.com/office/drawing/2010/main">
                 <a:noFill/>
               </a14:hiddenFill>
             </a:ext>
             <a:ext uri="{AF507438-7753-43e0-B8FC-AC1667EBCBE1}">
-              <a14:hiddenEffects xmlns:a14="http://schemas.microsoft.com/office/drawing/2010/main" xmlns="">
+              <a14:hiddenEffects xmlns="" xmlns:a14="http://schemas.microsoft.com/office/drawing/2010/main">
                 <a:effectLst>
                   <a:outerShdw blurRad="63500" dist="38099" dir="2700000" algn="ctr" rotWithShape="0">
                     <a:srgbClr val="000000">
@@ -10980,12 +10993,12 @@
           <a:effectLst/>
           <a:extLst>
             <a:ext uri="{909E8E84-426E-40dd-AFC4-6F175D3DCCD1}">
-              <a14:hiddenFill xmlns:a14="http://schemas.microsoft.com/office/drawing/2010/main" xmlns="">
+              <a14:hiddenFill xmlns="" xmlns:a14="http://schemas.microsoft.com/office/drawing/2010/main">
                 <a:noFill/>
               </a14:hiddenFill>
             </a:ext>
             <a:ext uri="{AF507438-7753-43e0-B8FC-AC1667EBCBE1}">
-              <a14:hiddenEffects xmlns:a14="http://schemas.microsoft.com/office/drawing/2010/main" xmlns="">
+              <a14:hiddenEffects xmlns="" xmlns:a14="http://schemas.microsoft.com/office/drawing/2010/main">
                 <a:effectLst>
                   <a:outerShdw blurRad="63500" dist="38099" dir="2700000" algn="ctr" rotWithShape="0">
                     <a:srgbClr val="000000">
@@ -11033,12 +11046,12 @@
           <a:effectLst/>
           <a:extLst>
             <a:ext uri="{909E8E84-426E-40dd-AFC4-6F175D3DCCD1}">
-              <a14:hiddenFill xmlns:a14="http://schemas.microsoft.com/office/drawing/2010/main" xmlns="">
+              <a14:hiddenFill xmlns="" xmlns:a14="http://schemas.microsoft.com/office/drawing/2010/main">
                 <a:noFill/>
               </a14:hiddenFill>
             </a:ext>
             <a:ext uri="{AF507438-7753-43e0-B8FC-AC1667EBCBE1}">
-              <a14:hiddenEffects xmlns:a14="http://schemas.microsoft.com/office/drawing/2010/main" xmlns="">
+              <a14:hiddenEffects xmlns="" xmlns:a14="http://schemas.microsoft.com/office/drawing/2010/main">
                 <a:effectLst>
                   <a:outerShdw blurRad="63500" dist="38099" dir="2700000" algn="ctr" rotWithShape="0">
                     <a:srgbClr val="000000">
@@ -11097,14 +11110,14 @@
             <a:effectLst/>
             <a:extLst>
               <a:ext uri="{909E8E84-426E-40dd-AFC4-6F175D3DCCD1}">
-                <a14:hiddenFill xmlns:a14="http://schemas.microsoft.com/office/drawing/2010/main" xmlns="">
+                <a14:hiddenFill xmlns="" xmlns:a14="http://schemas.microsoft.com/office/drawing/2010/main">
                   <a:solidFill>
                     <a:schemeClr val="accent1"/>
                   </a:solidFill>
                 </a14:hiddenFill>
               </a:ext>
               <a:ext uri="{91240B29-F687-4f45-9708-019B960494DF}">
-                <a14:hiddenLine xmlns:a14="http://schemas.microsoft.com/office/drawing/2010/main" xmlns="" w="9525">
+                <a14:hiddenLine xmlns="" xmlns:a14="http://schemas.microsoft.com/office/drawing/2010/main" w="9525">
                   <a:solidFill>
                     <a:schemeClr val="tx1"/>
                   </a:solidFill>
@@ -11114,7 +11127,7 @@
                 </a14:hiddenLine>
               </a:ext>
               <a:ext uri="{AF507438-7753-43e0-B8FC-AC1667EBCBE1}">
-                <a14:hiddenEffects xmlns:a14="http://schemas.microsoft.com/office/drawing/2010/main" xmlns="">
+                <a14:hiddenEffects xmlns="" xmlns:a14="http://schemas.microsoft.com/office/drawing/2010/main">
                   <a:effectLst>
                     <a:outerShdw blurRad="63500" dist="38099" dir="2700000" algn="ctr" rotWithShape="0">
                       <a:schemeClr val="bg2">
@@ -11271,14 +11284,14 @@
             <a:effectLst/>
             <a:extLst>
               <a:ext uri="{909E8E84-426E-40dd-AFC4-6F175D3DCCD1}">
-                <a14:hiddenFill xmlns:a14="http://schemas.microsoft.com/office/drawing/2010/main" xmlns="">
+                <a14:hiddenFill xmlns="" xmlns:a14="http://schemas.microsoft.com/office/drawing/2010/main">
                   <a:solidFill>
                     <a:schemeClr val="bg2"/>
                   </a:solidFill>
                 </a14:hiddenFill>
               </a:ext>
               <a:ext uri="{91240B29-F687-4f45-9708-019B960494DF}">
-                <a14:hiddenLine xmlns:a14="http://schemas.microsoft.com/office/drawing/2010/main" xmlns="" w="12700">
+                <a14:hiddenLine xmlns="" xmlns:a14="http://schemas.microsoft.com/office/drawing/2010/main" w="12700">
                   <a:solidFill>
                     <a:schemeClr val="tx1"/>
                   </a:solidFill>
@@ -11288,7 +11301,7 @@
                 </a14:hiddenLine>
               </a:ext>
               <a:ext uri="{AF507438-7753-43e0-B8FC-AC1667EBCBE1}">
-                <a14:hiddenEffects xmlns:a14="http://schemas.microsoft.com/office/drawing/2010/main" xmlns="">
+                <a14:hiddenEffects xmlns="" xmlns:a14="http://schemas.microsoft.com/office/drawing/2010/main">
                   <a:effectLst>
                     <a:outerShdw blurRad="63500" dist="38099" dir="2700000" algn="ctr" rotWithShape="0">
                       <a:schemeClr val="bg2">
@@ -11353,14 +11366,14 @@
             <a:effectLst/>
             <a:extLst>
               <a:ext uri="{909E8E84-426E-40dd-AFC4-6F175D3DCCD1}">
-                <a14:hiddenFill xmlns:a14="http://schemas.microsoft.com/office/drawing/2010/main" xmlns="">
+                <a14:hiddenFill xmlns="" xmlns:a14="http://schemas.microsoft.com/office/drawing/2010/main">
                   <a:solidFill>
                     <a:schemeClr val="accent1"/>
                   </a:solidFill>
                 </a14:hiddenFill>
               </a:ext>
               <a:ext uri="{91240B29-F687-4f45-9708-019B960494DF}">
-                <a14:hiddenLine xmlns:a14="http://schemas.microsoft.com/office/drawing/2010/main" xmlns="" w="9525">
+                <a14:hiddenLine xmlns="" xmlns:a14="http://schemas.microsoft.com/office/drawing/2010/main" w="9525">
                   <a:solidFill>
                     <a:schemeClr val="tx1"/>
                   </a:solidFill>
@@ -11370,7 +11383,7 @@
                 </a14:hiddenLine>
               </a:ext>
               <a:ext uri="{AF507438-7753-43e0-B8FC-AC1667EBCBE1}">
-                <a14:hiddenEffects xmlns:a14="http://schemas.microsoft.com/office/drawing/2010/main" xmlns="">
+                <a14:hiddenEffects xmlns="" xmlns:a14="http://schemas.microsoft.com/office/drawing/2010/main">
                   <a:effectLst>
                     <a:outerShdw blurRad="63500" dist="38099" dir="2700000" algn="ctr" rotWithShape="0">
                       <a:schemeClr val="bg2">
@@ -11527,14 +11540,14 @@
             <a:effectLst/>
             <a:extLst>
               <a:ext uri="{909E8E84-426E-40dd-AFC4-6F175D3DCCD1}">
-                <a14:hiddenFill xmlns:a14="http://schemas.microsoft.com/office/drawing/2010/main" xmlns="">
+                <a14:hiddenFill xmlns="" xmlns:a14="http://schemas.microsoft.com/office/drawing/2010/main">
                   <a:solidFill>
                     <a:schemeClr val="bg2"/>
                   </a:solidFill>
                 </a14:hiddenFill>
               </a:ext>
               <a:ext uri="{91240B29-F687-4f45-9708-019B960494DF}">
-                <a14:hiddenLine xmlns:a14="http://schemas.microsoft.com/office/drawing/2010/main" xmlns="" w="12700">
+                <a14:hiddenLine xmlns="" xmlns:a14="http://schemas.microsoft.com/office/drawing/2010/main" w="12700">
                   <a:solidFill>
                     <a:schemeClr val="tx1"/>
                   </a:solidFill>
@@ -11544,7 +11557,7 @@
                 </a14:hiddenLine>
               </a:ext>
               <a:ext uri="{AF507438-7753-43e0-B8FC-AC1667EBCBE1}">
-                <a14:hiddenEffects xmlns:a14="http://schemas.microsoft.com/office/drawing/2010/main" xmlns="">
+                <a14:hiddenEffects xmlns="" xmlns:a14="http://schemas.microsoft.com/office/drawing/2010/main">
                   <a:effectLst>
                     <a:outerShdw blurRad="63500" dist="38099" dir="2700000" algn="ctr" rotWithShape="0">
                       <a:schemeClr val="bg2">
@@ -11609,14 +11622,14 @@
             <a:effectLst/>
             <a:extLst>
               <a:ext uri="{909E8E84-426E-40dd-AFC4-6F175D3DCCD1}">
-                <a14:hiddenFill xmlns:a14="http://schemas.microsoft.com/office/drawing/2010/main" xmlns="">
+                <a14:hiddenFill xmlns="" xmlns:a14="http://schemas.microsoft.com/office/drawing/2010/main">
                   <a:solidFill>
                     <a:schemeClr val="accent1"/>
                   </a:solidFill>
                 </a14:hiddenFill>
               </a:ext>
               <a:ext uri="{91240B29-F687-4f45-9708-019B960494DF}">
-                <a14:hiddenLine xmlns:a14="http://schemas.microsoft.com/office/drawing/2010/main" xmlns="" w="9525">
+                <a14:hiddenLine xmlns="" xmlns:a14="http://schemas.microsoft.com/office/drawing/2010/main" w="9525">
                   <a:solidFill>
                     <a:schemeClr val="tx1"/>
                   </a:solidFill>
@@ -11626,7 +11639,7 @@
                 </a14:hiddenLine>
               </a:ext>
               <a:ext uri="{AF507438-7753-43e0-B8FC-AC1667EBCBE1}">
-                <a14:hiddenEffects xmlns:a14="http://schemas.microsoft.com/office/drawing/2010/main" xmlns="">
+                <a14:hiddenEffects xmlns="" xmlns:a14="http://schemas.microsoft.com/office/drawing/2010/main">
                   <a:effectLst>
                     <a:outerShdw blurRad="63500" dist="38099" dir="2700000" algn="ctr" rotWithShape="0">
                       <a:schemeClr val="bg2">
@@ -11783,14 +11796,14 @@
             <a:effectLst/>
             <a:extLst>
               <a:ext uri="{909E8E84-426E-40dd-AFC4-6F175D3DCCD1}">
-                <a14:hiddenFill xmlns:a14="http://schemas.microsoft.com/office/drawing/2010/main" xmlns="">
+                <a14:hiddenFill xmlns="" xmlns:a14="http://schemas.microsoft.com/office/drawing/2010/main">
                   <a:solidFill>
                     <a:schemeClr val="bg2"/>
                   </a:solidFill>
                 </a14:hiddenFill>
               </a:ext>
               <a:ext uri="{91240B29-F687-4f45-9708-019B960494DF}">
-                <a14:hiddenLine xmlns:a14="http://schemas.microsoft.com/office/drawing/2010/main" xmlns="" w="12700">
+                <a14:hiddenLine xmlns="" xmlns:a14="http://schemas.microsoft.com/office/drawing/2010/main" w="12700">
                   <a:solidFill>
                     <a:schemeClr val="tx1"/>
                   </a:solidFill>
@@ -11800,7 +11813,7 @@
                 </a14:hiddenLine>
               </a:ext>
               <a:ext uri="{AF507438-7753-43e0-B8FC-AC1667EBCBE1}">
-                <a14:hiddenEffects xmlns:a14="http://schemas.microsoft.com/office/drawing/2010/main" xmlns="">
+                <a14:hiddenEffects xmlns="" xmlns:a14="http://schemas.microsoft.com/office/drawing/2010/main">
                   <a:effectLst>
                     <a:outerShdw blurRad="63500" dist="38099" dir="2700000" algn="ctr" rotWithShape="0">
                       <a:schemeClr val="bg2">
@@ -11865,14 +11878,14 @@
             <a:effectLst/>
             <a:extLst>
               <a:ext uri="{909E8E84-426E-40dd-AFC4-6F175D3DCCD1}">
-                <a14:hiddenFill xmlns:a14="http://schemas.microsoft.com/office/drawing/2010/main" xmlns="">
+                <a14:hiddenFill xmlns="" xmlns:a14="http://schemas.microsoft.com/office/drawing/2010/main">
                   <a:solidFill>
                     <a:schemeClr val="accent1"/>
                   </a:solidFill>
                 </a14:hiddenFill>
               </a:ext>
               <a:ext uri="{91240B29-F687-4f45-9708-019B960494DF}">
-                <a14:hiddenLine xmlns:a14="http://schemas.microsoft.com/office/drawing/2010/main" xmlns="" w="9525">
+                <a14:hiddenLine xmlns="" xmlns:a14="http://schemas.microsoft.com/office/drawing/2010/main" w="9525">
                   <a:solidFill>
                     <a:schemeClr val="tx1"/>
                   </a:solidFill>
@@ -11882,7 +11895,7 @@
                 </a14:hiddenLine>
               </a:ext>
               <a:ext uri="{AF507438-7753-43e0-B8FC-AC1667EBCBE1}">
-                <a14:hiddenEffects xmlns:a14="http://schemas.microsoft.com/office/drawing/2010/main" xmlns="">
+                <a14:hiddenEffects xmlns="" xmlns:a14="http://schemas.microsoft.com/office/drawing/2010/main">
                   <a:effectLst>
                     <a:outerShdw blurRad="63500" dist="38099" dir="2700000" algn="ctr" rotWithShape="0">
                       <a:schemeClr val="bg2">
@@ -12039,14 +12052,14 @@
             <a:effectLst/>
             <a:extLst>
               <a:ext uri="{909E8E84-426E-40dd-AFC4-6F175D3DCCD1}">
-                <a14:hiddenFill xmlns:a14="http://schemas.microsoft.com/office/drawing/2010/main" xmlns="">
+                <a14:hiddenFill xmlns="" xmlns:a14="http://schemas.microsoft.com/office/drawing/2010/main">
                   <a:solidFill>
                     <a:schemeClr val="bg2"/>
                   </a:solidFill>
                 </a14:hiddenFill>
               </a:ext>
               <a:ext uri="{91240B29-F687-4f45-9708-019B960494DF}">
-                <a14:hiddenLine xmlns:a14="http://schemas.microsoft.com/office/drawing/2010/main" xmlns="" w="12700">
+                <a14:hiddenLine xmlns="" xmlns:a14="http://schemas.microsoft.com/office/drawing/2010/main" w="12700">
                   <a:solidFill>
                     <a:schemeClr val="tx1"/>
                   </a:solidFill>
@@ -12056,7 +12069,7 @@
                 </a14:hiddenLine>
               </a:ext>
               <a:ext uri="{AF507438-7753-43e0-B8FC-AC1667EBCBE1}">
-                <a14:hiddenEffects xmlns:a14="http://schemas.microsoft.com/office/drawing/2010/main" xmlns="">
+                <a14:hiddenEffects xmlns="" xmlns:a14="http://schemas.microsoft.com/office/drawing/2010/main">
                   <a:effectLst>
                     <a:outerShdw blurRad="63500" dist="38099" dir="2700000" algn="ctr" rotWithShape="0">
                       <a:schemeClr val="bg2">
@@ -12121,14 +12134,14 @@
             <a:effectLst/>
             <a:extLst>
               <a:ext uri="{909E8E84-426E-40dd-AFC4-6F175D3DCCD1}">
-                <a14:hiddenFill xmlns:a14="http://schemas.microsoft.com/office/drawing/2010/main" xmlns="">
+                <a14:hiddenFill xmlns="" xmlns:a14="http://schemas.microsoft.com/office/drawing/2010/main">
                   <a:solidFill>
                     <a:schemeClr val="accent1"/>
                   </a:solidFill>
                 </a14:hiddenFill>
               </a:ext>
               <a:ext uri="{91240B29-F687-4f45-9708-019B960494DF}">
-                <a14:hiddenLine xmlns:a14="http://schemas.microsoft.com/office/drawing/2010/main" xmlns="" w="9525">
+                <a14:hiddenLine xmlns="" xmlns:a14="http://schemas.microsoft.com/office/drawing/2010/main" w="9525">
                   <a:solidFill>
                     <a:schemeClr val="tx1"/>
                   </a:solidFill>
@@ -12138,7 +12151,7 @@
                 </a14:hiddenLine>
               </a:ext>
               <a:ext uri="{AF507438-7753-43e0-B8FC-AC1667EBCBE1}">
-                <a14:hiddenEffects xmlns:a14="http://schemas.microsoft.com/office/drawing/2010/main" xmlns="">
+                <a14:hiddenEffects xmlns="" xmlns:a14="http://schemas.microsoft.com/office/drawing/2010/main">
                   <a:effectLst>
                     <a:outerShdw blurRad="63500" dist="38099" dir="2700000" algn="ctr" rotWithShape="0">
                       <a:schemeClr val="bg2">
@@ -12295,14 +12308,14 @@
             <a:effectLst/>
             <a:extLst>
               <a:ext uri="{909E8E84-426E-40dd-AFC4-6F175D3DCCD1}">
-                <a14:hiddenFill xmlns:a14="http://schemas.microsoft.com/office/drawing/2010/main" xmlns="">
+                <a14:hiddenFill xmlns="" xmlns:a14="http://schemas.microsoft.com/office/drawing/2010/main">
                   <a:solidFill>
                     <a:schemeClr val="bg2"/>
                   </a:solidFill>
                 </a14:hiddenFill>
               </a:ext>
               <a:ext uri="{91240B29-F687-4f45-9708-019B960494DF}">
-                <a14:hiddenLine xmlns:a14="http://schemas.microsoft.com/office/drawing/2010/main" xmlns="" w="12700">
+                <a14:hiddenLine xmlns="" xmlns:a14="http://schemas.microsoft.com/office/drawing/2010/main" w="12700">
                   <a:solidFill>
                     <a:schemeClr val="tx1"/>
                   </a:solidFill>
@@ -12312,7 +12325,7 @@
                 </a14:hiddenLine>
               </a:ext>
               <a:ext uri="{AF507438-7753-43e0-B8FC-AC1667EBCBE1}">
-                <a14:hiddenEffects xmlns:a14="http://schemas.microsoft.com/office/drawing/2010/main" xmlns="">
+                <a14:hiddenEffects xmlns="" xmlns:a14="http://schemas.microsoft.com/office/drawing/2010/main">
                   <a:effectLst>
                     <a:outerShdw blurRad="63500" dist="38099" dir="2700000" algn="ctr" rotWithShape="0">
                       <a:schemeClr val="bg2">
@@ -12361,14 +12374,14 @@
           <a:effectLst/>
           <a:extLst>
             <a:ext uri="{909E8E84-426E-40dd-AFC4-6F175D3DCCD1}">
-              <a14:hiddenFill xmlns:a14="http://schemas.microsoft.com/office/drawing/2010/main" xmlns="">
+              <a14:hiddenFill xmlns="" xmlns:a14="http://schemas.microsoft.com/office/drawing/2010/main">
                 <a:solidFill>
                   <a:schemeClr val="bg2"/>
                 </a:solidFill>
               </a14:hiddenFill>
             </a:ext>
             <a:ext uri="{91240B29-F687-4f45-9708-019B960494DF}">
-              <a14:hiddenLine xmlns:a14="http://schemas.microsoft.com/office/drawing/2010/main" xmlns="" w="12700">
+              <a14:hiddenLine xmlns="" xmlns:a14="http://schemas.microsoft.com/office/drawing/2010/main" w="12700">
                 <a:solidFill>
                   <a:schemeClr val="tx1"/>
                 </a:solidFill>
@@ -12378,7 +12391,7 @@
               </a14:hiddenLine>
             </a:ext>
             <a:ext uri="{AF507438-7753-43e0-B8FC-AC1667EBCBE1}">
-              <a14:hiddenEffects xmlns:a14="http://schemas.microsoft.com/office/drawing/2010/main" xmlns="">
+              <a14:hiddenEffects xmlns="" xmlns:a14="http://schemas.microsoft.com/office/drawing/2010/main">
                 <a:effectLst>
                   <a:outerShdw blurRad="63500" dist="38099" dir="2700000" algn="ctr" rotWithShape="0">
                     <a:schemeClr val="bg2">
@@ -12426,14 +12439,14 @@
           <a:effectLst/>
           <a:extLst>
             <a:ext uri="{909E8E84-426E-40dd-AFC4-6F175D3DCCD1}">
-              <a14:hiddenFill xmlns:a14="http://schemas.microsoft.com/office/drawing/2010/main" xmlns="">
+              <a14:hiddenFill xmlns="" xmlns:a14="http://schemas.microsoft.com/office/drawing/2010/main">
                 <a:solidFill>
                   <a:schemeClr val="bg2"/>
                 </a:solidFill>
               </a14:hiddenFill>
             </a:ext>
             <a:ext uri="{91240B29-F687-4f45-9708-019B960494DF}">
-              <a14:hiddenLine xmlns:a14="http://schemas.microsoft.com/office/drawing/2010/main" xmlns="" w="12700">
+              <a14:hiddenLine xmlns="" xmlns:a14="http://schemas.microsoft.com/office/drawing/2010/main" w="12700">
                 <a:solidFill>
                   <a:schemeClr val="tx1"/>
                 </a:solidFill>
@@ -12443,7 +12456,7 @@
               </a14:hiddenLine>
             </a:ext>
             <a:ext uri="{AF507438-7753-43e0-B8FC-AC1667EBCBE1}">
-              <a14:hiddenEffects xmlns:a14="http://schemas.microsoft.com/office/drawing/2010/main" xmlns="">
+              <a14:hiddenEffects xmlns="" xmlns:a14="http://schemas.microsoft.com/office/drawing/2010/main">
                 <a:effectLst>
                   <a:outerShdw blurRad="63500" dist="38099" dir="2700000" algn="ctr" rotWithShape="0">
                     <a:schemeClr val="bg2">
@@ -12496,12 +12509,12 @@
           <a:effectLst/>
           <a:extLst>
             <a:ext uri="{909E8E84-426E-40dd-AFC4-6F175D3DCCD1}">
-              <a14:hiddenFill xmlns:a14="http://schemas.microsoft.com/office/drawing/2010/main" xmlns="">
+              <a14:hiddenFill xmlns="" xmlns:a14="http://schemas.microsoft.com/office/drawing/2010/main">
                 <a:noFill/>
               </a14:hiddenFill>
             </a:ext>
             <a:ext uri="{AF507438-7753-43e0-B8FC-AC1667EBCBE1}">
-              <a14:hiddenEffects xmlns:a14="http://schemas.microsoft.com/office/drawing/2010/main" xmlns="">
+              <a14:hiddenEffects xmlns="" xmlns:a14="http://schemas.microsoft.com/office/drawing/2010/main">
                 <a:effectLst>
                   <a:outerShdw blurRad="63500" dist="38099" dir="2700000" algn="ctr" rotWithShape="0">
                     <a:srgbClr val="000000">
@@ -12549,12 +12562,12 @@
           <a:effectLst/>
           <a:extLst>
             <a:ext uri="{909E8E84-426E-40dd-AFC4-6F175D3DCCD1}">
-              <a14:hiddenFill xmlns:a14="http://schemas.microsoft.com/office/drawing/2010/main" xmlns="">
+              <a14:hiddenFill xmlns="" xmlns:a14="http://schemas.microsoft.com/office/drawing/2010/main">
                 <a:noFill/>
               </a14:hiddenFill>
             </a:ext>
             <a:ext uri="{AF507438-7753-43e0-B8FC-AC1667EBCBE1}">
-              <a14:hiddenEffects xmlns:a14="http://schemas.microsoft.com/office/drawing/2010/main" xmlns="">
+              <a14:hiddenEffects xmlns="" xmlns:a14="http://schemas.microsoft.com/office/drawing/2010/main">
                 <a:effectLst>
                   <a:outerShdw blurRad="63500" dist="38099" dir="2700000" algn="ctr" rotWithShape="0">
                     <a:srgbClr val="000000">
@@ -12602,12 +12615,12 @@
           <a:effectLst/>
           <a:extLst>
             <a:ext uri="{909E8E84-426E-40dd-AFC4-6F175D3DCCD1}">
-              <a14:hiddenFill xmlns:a14="http://schemas.microsoft.com/office/drawing/2010/main" xmlns="">
+              <a14:hiddenFill xmlns="" xmlns:a14="http://schemas.microsoft.com/office/drawing/2010/main">
                 <a:noFill/>
               </a14:hiddenFill>
             </a:ext>
             <a:ext uri="{AF507438-7753-43e0-B8FC-AC1667EBCBE1}">
-              <a14:hiddenEffects xmlns:a14="http://schemas.microsoft.com/office/drawing/2010/main" xmlns="">
+              <a14:hiddenEffects xmlns="" xmlns:a14="http://schemas.microsoft.com/office/drawing/2010/main">
                 <a:effectLst>
                   <a:outerShdw blurRad="63500" dist="38099" dir="2700000" algn="ctr" rotWithShape="0">
                     <a:srgbClr val="000000">
@@ -12655,12 +12668,12 @@
           <a:effectLst/>
           <a:extLst>
             <a:ext uri="{909E8E84-426E-40dd-AFC4-6F175D3DCCD1}">
-              <a14:hiddenFill xmlns:a14="http://schemas.microsoft.com/office/drawing/2010/main" xmlns="">
+              <a14:hiddenFill xmlns="" xmlns:a14="http://schemas.microsoft.com/office/drawing/2010/main">
                 <a:noFill/>
               </a14:hiddenFill>
             </a:ext>
             <a:ext uri="{AF507438-7753-43e0-B8FC-AC1667EBCBE1}">
-              <a14:hiddenEffects xmlns:a14="http://schemas.microsoft.com/office/drawing/2010/main" xmlns="">
+              <a14:hiddenEffects xmlns="" xmlns:a14="http://schemas.microsoft.com/office/drawing/2010/main">
                 <a:effectLst>
                   <a:outerShdw blurRad="63500" dist="38099" dir="2700000" algn="ctr" rotWithShape="0">
                     <a:srgbClr val="000000">
@@ -12708,12 +12721,12 @@
           <a:effectLst/>
           <a:extLst>
             <a:ext uri="{909E8E84-426E-40dd-AFC4-6F175D3DCCD1}">
-              <a14:hiddenFill xmlns:a14="http://schemas.microsoft.com/office/drawing/2010/main" xmlns="">
+              <a14:hiddenFill xmlns="" xmlns:a14="http://schemas.microsoft.com/office/drawing/2010/main">
                 <a:noFill/>
               </a14:hiddenFill>
             </a:ext>
             <a:ext uri="{AF507438-7753-43e0-B8FC-AC1667EBCBE1}">
-              <a14:hiddenEffects xmlns:a14="http://schemas.microsoft.com/office/drawing/2010/main" xmlns="">
+              <a14:hiddenEffects xmlns="" xmlns:a14="http://schemas.microsoft.com/office/drawing/2010/main">
                 <a:effectLst>
                   <a:outerShdw blurRad="63500" dist="38099" dir="2700000" algn="ctr" rotWithShape="0">
                     <a:srgbClr val="000000">
@@ -12761,12 +12774,12 @@
           <a:effectLst/>
           <a:extLst>
             <a:ext uri="{909E8E84-426E-40dd-AFC4-6F175D3DCCD1}">
-              <a14:hiddenFill xmlns:a14="http://schemas.microsoft.com/office/drawing/2010/main" xmlns="">
+              <a14:hiddenFill xmlns="" xmlns:a14="http://schemas.microsoft.com/office/drawing/2010/main">
                 <a:noFill/>
               </a14:hiddenFill>
             </a:ext>
             <a:ext uri="{AF507438-7753-43e0-B8FC-AC1667EBCBE1}">
-              <a14:hiddenEffects xmlns:a14="http://schemas.microsoft.com/office/drawing/2010/main" xmlns="">
+              <a14:hiddenEffects xmlns="" xmlns:a14="http://schemas.microsoft.com/office/drawing/2010/main">
                 <a:effectLst>
                   <a:outerShdw blurRad="63500" dist="38099" dir="2700000" algn="ctr" rotWithShape="0">
                     <a:srgbClr val="000000">
@@ -12825,14 +12838,14 @@
             <a:effectLst/>
             <a:extLst>
               <a:ext uri="{909E8E84-426E-40dd-AFC4-6F175D3DCCD1}">
-                <a14:hiddenFill xmlns:a14="http://schemas.microsoft.com/office/drawing/2010/main" xmlns="">
+                <a14:hiddenFill xmlns="" xmlns:a14="http://schemas.microsoft.com/office/drawing/2010/main">
                   <a:solidFill>
                     <a:schemeClr val="accent1"/>
                   </a:solidFill>
                 </a14:hiddenFill>
               </a:ext>
               <a:ext uri="{91240B29-F687-4f45-9708-019B960494DF}">
-                <a14:hiddenLine xmlns:a14="http://schemas.microsoft.com/office/drawing/2010/main" xmlns="" w="9525">
+                <a14:hiddenLine xmlns="" xmlns:a14="http://schemas.microsoft.com/office/drawing/2010/main" w="9525">
                   <a:solidFill>
                     <a:schemeClr val="tx1"/>
                   </a:solidFill>
@@ -12842,7 +12855,7 @@
                 </a14:hiddenLine>
               </a:ext>
               <a:ext uri="{AF507438-7753-43e0-B8FC-AC1667EBCBE1}">
-                <a14:hiddenEffects xmlns:a14="http://schemas.microsoft.com/office/drawing/2010/main" xmlns="">
+                <a14:hiddenEffects xmlns="" xmlns:a14="http://schemas.microsoft.com/office/drawing/2010/main">
                   <a:effectLst>
                     <a:outerShdw blurRad="63500" dist="38099" dir="2700000" algn="ctr" rotWithShape="0">
                       <a:schemeClr val="bg2">
@@ -12999,14 +13012,14 @@
             <a:effectLst/>
             <a:extLst>
               <a:ext uri="{909E8E84-426E-40dd-AFC4-6F175D3DCCD1}">
-                <a14:hiddenFill xmlns:a14="http://schemas.microsoft.com/office/drawing/2010/main" xmlns="">
+                <a14:hiddenFill xmlns="" xmlns:a14="http://schemas.microsoft.com/office/drawing/2010/main">
                   <a:solidFill>
                     <a:schemeClr val="bg2"/>
                   </a:solidFill>
                 </a14:hiddenFill>
               </a:ext>
               <a:ext uri="{91240B29-F687-4f45-9708-019B960494DF}">
-                <a14:hiddenLine xmlns:a14="http://schemas.microsoft.com/office/drawing/2010/main" xmlns="" w="12700">
+                <a14:hiddenLine xmlns="" xmlns:a14="http://schemas.microsoft.com/office/drawing/2010/main" w="12700">
                   <a:solidFill>
                     <a:schemeClr val="tx1"/>
                   </a:solidFill>
@@ -13016,7 +13029,7 @@
                 </a14:hiddenLine>
               </a:ext>
               <a:ext uri="{AF507438-7753-43e0-B8FC-AC1667EBCBE1}">
-                <a14:hiddenEffects xmlns:a14="http://schemas.microsoft.com/office/drawing/2010/main" xmlns="">
+                <a14:hiddenEffects xmlns="" xmlns:a14="http://schemas.microsoft.com/office/drawing/2010/main">
                   <a:effectLst>
                     <a:outerShdw blurRad="63500" dist="38099" dir="2700000" algn="ctr" rotWithShape="0">
                       <a:schemeClr val="bg2">
@@ -13070,12 +13083,12 @@
           <a:effectLst/>
           <a:extLst>
             <a:ext uri="{909E8E84-426E-40dd-AFC4-6F175D3DCCD1}">
-              <a14:hiddenFill xmlns:a14="http://schemas.microsoft.com/office/drawing/2010/main" xmlns="">
+              <a14:hiddenFill xmlns="" xmlns:a14="http://schemas.microsoft.com/office/drawing/2010/main">
                 <a:noFill/>
               </a14:hiddenFill>
             </a:ext>
             <a:ext uri="{AF507438-7753-43e0-B8FC-AC1667EBCBE1}">
-              <a14:hiddenEffects xmlns:a14="http://schemas.microsoft.com/office/drawing/2010/main" xmlns="">
+              <a14:hiddenEffects xmlns="" xmlns:a14="http://schemas.microsoft.com/office/drawing/2010/main">
                 <a:effectLst>
                   <a:outerShdw blurRad="63500" dist="38099" dir="2700000" algn="ctr" rotWithShape="0">
                     <a:schemeClr val="bg2">
@@ -13125,12 +13138,12 @@
           <a:effectLst/>
           <a:extLst>
             <a:ext uri="{909E8E84-426E-40dd-AFC4-6F175D3DCCD1}">
-              <a14:hiddenFill xmlns:a14="http://schemas.microsoft.com/office/drawing/2010/main" xmlns="">
+              <a14:hiddenFill xmlns="" xmlns:a14="http://schemas.microsoft.com/office/drawing/2010/main">
                 <a:noFill/>
               </a14:hiddenFill>
             </a:ext>
             <a:ext uri="{AF507438-7753-43e0-B8FC-AC1667EBCBE1}">
-              <a14:hiddenEffects xmlns:a14="http://schemas.microsoft.com/office/drawing/2010/main" xmlns="">
+              <a14:hiddenEffects xmlns="" xmlns:a14="http://schemas.microsoft.com/office/drawing/2010/main">
                 <a:effectLst>
                   <a:outerShdw blurRad="63500" dist="38099" dir="2700000" algn="ctr" rotWithShape="0">
                     <a:schemeClr val="bg2">
@@ -13175,14 +13188,14 @@
           <a:effectLst/>
           <a:extLst>
             <a:ext uri="{909E8E84-426E-40dd-AFC4-6F175D3DCCD1}">
-              <a14:hiddenFill xmlns:a14="http://schemas.microsoft.com/office/drawing/2010/main" xmlns="">
+              <a14:hiddenFill xmlns="" xmlns:a14="http://schemas.microsoft.com/office/drawing/2010/main">
                 <a:solidFill>
                   <a:srgbClr val="FFFF99"/>
                 </a:solidFill>
               </a14:hiddenFill>
             </a:ext>
             <a:ext uri="{91240B29-F687-4f45-9708-019B960494DF}">
-              <a14:hiddenLine xmlns:a14="http://schemas.microsoft.com/office/drawing/2010/main" xmlns="" w="12700">
+              <a14:hiddenLine xmlns="" xmlns:a14="http://schemas.microsoft.com/office/drawing/2010/main" w="12700">
                 <a:solidFill>
                   <a:schemeClr val="tx1"/>
                 </a:solidFill>
@@ -13192,7 +13205,7 @@
               </a14:hiddenLine>
             </a:ext>
             <a:ext uri="{AF507438-7753-43e0-B8FC-AC1667EBCBE1}">
-              <a14:hiddenEffects xmlns:a14="http://schemas.microsoft.com/office/drawing/2010/main" xmlns="">
+              <a14:hiddenEffects xmlns="" xmlns:a14="http://schemas.microsoft.com/office/drawing/2010/main">
                 <a:effectLst>
                   <a:outerShdw blurRad="63500" dist="38099" dir="2700000" algn="ctr" rotWithShape="0">
                     <a:schemeClr val="bg2">
@@ -13244,14 +13257,14 @@
           <a:effectLst/>
           <a:extLst>
             <a:ext uri="{909E8E84-426E-40dd-AFC4-6F175D3DCCD1}">
-              <a14:hiddenFill xmlns:a14="http://schemas.microsoft.com/office/drawing/2010/main" xmlns="">
+              <a14:hiddenFill xmlns="" xmlns:a14="http://schemas.microsoft.com/office/drawing/2010/main">
                 <a:solidFill>
                   <a:srgbClr val="FFFF99"/>
                 </a:solidFill>
               </a14:hiddenFill>
             </a:ext>
             <a:ext uri="{91240B29-F687-4f45-9708-019B960494DF}">
-              <a14:hiddenLine xmlns:a14="http://schemas.microsoft.com/office/drawing/2010/main" xmlns="" w="12700">
+              <a14:hiddenLine xmlns="" xmlns:a14="http://schemas.microsoft.com/office/drawing/2010/main" w="12700">
                 <a:solidFill>
                   <a:schemeClr val="tx1"/>
                 </a:solidFill>
@@ -13261,7 +13274,7 @@
               </a14:hiddenLine>
             </a:ext>
             <a:ext uri="{AF507438-7753-43e0-B8FC-AC1667EBCBE1}">
-              <a14:hiddenEffects xmlns:a14="http://schemas.microsoft.com/office/drawing/2010/main" xmlns="">
+              <a14:hiddenEffects xmlns="" xmlns:a14="http://schemas.microsoft.com/office/drawing/2010/main">
                 <a:effectLst>
                   <a:outerShdw blurRad="63500" dist="38099" dir="2700000" algn="ctr" rotWithShape="0">
                     <a:schemeClr val="bg2">
@@ -13329,14 +13342,14 @@
             <a:effectLst/>
             <a:extLst>
               <a:ext uri="{909E8E84-426E-40dd-AFC4-6F175D3DCCD1}">
-                <a14:hiddenFill xmlns:a14="http://schemas.microsoft.com/office/drawing/2010/main" xmlns="">
+                <a14:hiddenFill xmlns="" xmlns:a14="http://schemas.microsoft.com/office/drawing/2010/main">
                   <a:solidFill>
                     <a:schemeClr val="accent1"/>
                   </a:solidFill>
                 </a14:hiddenFill>
               </a:ext>
               <a:ext uri="{91240B29-F687-4f45-9708-019B960494DF}">
-                <a14:hiddenLine xmlns:a14="http://schemas.microsoft.com/office/drawing/2010/main" xmlns="" w="9525">
+                <a14:hiddenLine xmlns="" xmlns:a14="http://schemas.microsoft.com/office/drawing/2010/main" w="9525">
                   <a:solidFill>
                     <a:schemeClr val="tx1"/>
                   </a:solidFill>
@@ -13346,7 +13359,7 @@
                 </a14:hiddenLine>
               </a:ext>
               <a:ext uri="{AF507438-7753-43e0-B8FC-AC1667EBCBE1}">
-                <a14:hiddenEffects xmlns:a14="http://schemas.microsoft.com/office/drawing/2010/main" xmlns="">
+                <a14:hiddenEffects xmlns="" xmlns:a14="http://schemas.microsoft.com/office/drawing/2010/main">
                   <a:effectLst>
                     <a:outerShdw blurRad="63500" dist="38099" dir="2700000" algn="ctr" rotWithShape="0">
                       <a:schemeClr val="bg2">
@@ -13500,14 +13513,14 @@
             <a:effectLst/>
             <a:extLst>
               <a:ext uri="{909E8E84-426E-40dd-AFC4-6F175D3DCCD1}">
-                <a14:hiddenFill xmlns:a14="http://schemas.microsoft.com/office/drawing/2010/main" xmlns="">
+                <a14:hiddenFill xmlns="" xmlns:a14="http://schemas.microsoft.com/office/drawing/2010/main">
                   <a:solidFill>
                     <a:schemeClr val="bg2"/>
                   </a:solidFill>
                 </a14:hiddenFill>
               </a:ext>
               <a:ext uri="{91240B29-F687-4f45-9708-019B960494DF}">
-                <a14:hiddenLine xmlns:a14="http://schemas.microsoft.com/office/drawing/2010/main" xmlns="" w="12700">
+                <a14:hiddenLine xmlns="" xmlns:a14="http://schemas.microsoft.com/office/drawing/2010/main" w="12700">
                   <a:solidFill>
                     <a:schemeClr val="tx1"/>
                   </a:solidFill>
@@ -13517,7 +13530,7 @@
                 </a14:hiddenLine>
               </a:ext>
               <a:ext uri="{AF507438-7753-43e0-B8FC-AC1667EBCBE1}">
-                <a14:hiddenEffects xmlns:a14="http://schemas.microsoft.com/office/drawing/2010/main" xmlns="">
+                <a14:hiddenEffects xmlns="" xmlns:a14="http://schemas.microsoft.com/office/drawing/2010/main">
                   <a:effectLst>
                     <a:outerShdw blurRad="63500" dist="38099" dir="2700000" algn="ctr" rotWithShape="0">
                       <a:schemeClr val="bg2">
@@ -13582,14 +13595,14 @@
             <a:effectLst/>
             <a:extLst>
               <a:ext uri="{909E8E84-426E-40dd-AFC4-6F175D3DCCD1}">
-                <a14:hiddenFill xmlns:a14="http://schemas.microsoft.com/office/drawing/2010/main" xmlns="">
+                <a14:hiddenFill xmlns="" xmlns:a14="http://schemas.microsoft.com/office/drawing/2010/main">
                   <a:solidFill>
                     <a:schemeClr val="accent1"/>
                   </a:solidFill>
                 </a14:hiddenFill>
               </a:ext>
               <a:ext uri="{91240B29-F687-4f45-9708-019B960494DF}">
-                <a14:hiddenLine xmlns:a14="http://schemas.microsoft.com/office/drawing/2010/main" xmlns="" w="9525">
+                <a14:hiddenLine xmlns="" xmlns:a14="http://schemas.microsoft.com/office/drawing/2010/main" w="9525">
                   <a:solidFill>
                     <a:schemeClr val="tx1"/>
                   </a:solidFill>
@@ -13599,7 +13612,7 @@
                 </a14:hiddenLine>
               </a:ext>
               <a:ext uri="{AF507438-7753-43e0-B8FC-AC1667EBCBE1}">
-                <a14:hiddenEffects xmlns:a14="http://schemas.microsoft.com/office/drawing/2010/main" xmlns="">
+                <a14:hiddenEffects xmlns="" xmlns:a14="http://schemas.microsoft.com/office/drawing/2010/main">
                   <a:effectLst>
                     <a:outerShdw blurRad="63500" dist="38099" dir="2700000" algn="ctr" rotWithShape="0">
                       <a:schemeClr val="bg2">
@@ -13753,14 +13766,14 @@
             <a:effectLst/>
             <a:extLst>
               <a:ext uri="{909E8E84-426E-40dd-AFC4-6F175D3DCCD1}">
-                <a14:hiddenFill xmlns:a14="http://schemas.microsoft.com/office/drawing/2010/main" xmlns="">
+                <a14:hiddenFill xmlns="" xmlns:a14="http://schemas.microsoft.com/office/drawing/2010/main">
                   <a:solidFill>
                     <a:schemeClr val="bg2"/>
                   </a:solidFill>
                 </a14:hiddenFill>
               </a:ext>
               <a:ext uri="{91240B29-F687-4f45-9708-019B960494DF}">
-                <a14:hiddenLine xmlns:a14="http://schemas.microsoft.com/office/drawing/2010/main" xmlns="" w="12700">
+                <a14:hiddenLine xmlns="" xmlns:a14="http://schemas.microsoft.com/office/drawing/2010/main" w="12700">
                   <a:solidFill>
                     <a:schemeClr val="tx1"/>
                   </a:solidFill>
@@ -13770,7 +13783,7 @@
                 </a14:hiddenLine>
               </a:ext>
               <a:ext uri="{AF507438-7753-43e0-B8FC-AC1667EBCBE1}">
-                <a14:hiddenEffects xmlns:a14="http://schemas.microsoft.com/office/drawing/2010/main" xmlns="">
+                <a14:hiddenEffects xmlns="" xmlns:a14="http://schemas.microsoft.com/office/drawing/2010/main">
                   <a:effectLst>
                     <a:outerShdw blurRad="63500" dist="38099" dir="2700000" algn="ctr" rotWithShape="0">
                       <a:schemeClr val="bg2">
@@ -13840,12 +13853,12 @@
             <a:effectLst/>
             <a:extLst>
               <a:ext uri="{909E8E84-426E-40dd-AFC4-6F175D3DCCD1}">
-                <a14:hiddenFill xmlns:a14="http://schemas.microsoft.com/office/drawing/2010/main" xmlns="">
+                <a14:hiddenFill xmlns="" xmlns:a14="http://schemas.microsoft.com/office/drawing/2010/main">
                   <a:noFill/>
                 </a14:hiddenFill>
               </a:ext>
               <a:ext uri="{AF507438-7753-43e0-B8FC-AC1667EBCBE1}">
-                <a14:hiddenEffects xmlns:a14="http://schemas.microsoft.com/office/drawing/2010/main" xmlns="">
+                <a14:hiddenEffects xmlns="" xmlns:a14="http://schemas.microsoft.com/office/drawing/2010/main">
                   <a:effectLst>
                     <a:outerShdw blurRad="63500" dist="38099" dir="2700000" algn="ctr" rotWithShape="0">
                       <a:schemeClr val="bg2">
@@ -13893,12 +13906,12 @@
             <a:effectLst/>
             <a:extLst>
               <a:ext uri="{909E8E84-426E-40dd-AFC4-6F175D3DCCD1}">
-                <a14:hiddenFill xmlns:a14="http://schemas.microsoft.com/office/drawing/2010/main" xmlns="">
+                <a14:hiddenFill xmlns="" xmlns:a14="http://schemas.microsoft.com/office/drawing/2010/main">
                   <a:noFill/>
                 </a14:hiddenFill>
               </a:ext>
               <a:ext uri="{AF507438-7753-43e0-B8FC-AC1667EBCBE1}">
-                <a14:hiddenEffects xmlns:a14="http://schemas.microsoft.com/office/drawing/2010/main" xmlns="">
+                <a14:hiddenEffects xmlns="" xmlns:a14="http://schemas.microsoft.com/office/drawing/2010/main">
                   <a:effectLst>
                     <a:outerShdw blurRad="63500" dist="38099" dir="2700000" algn="ctr" rotWithShape="0">
                       <a:schemeClr val="bg2">
@@ -13946,12 +13959,12 @@
             <a:effectLst/>
             <a:extLst>
               <a:ext uri="{909E8E84-426E-40dd-AFC4-6F175D3DCCD1}">
-                <a14:hiddenFill xmlns:a14="http://schemas.microsoft.com/office/drawing/2010/main" xmlns="">
+                <a14:hiddenFill xmlns="" xmlns:a14="http://schemas.microsoft.com/office/drawing/2010/main">
                   <a:noFill/>
                 </a14:hiddenFill>
               </a:ext>
               <a:ext uri="{AF507438-7753-43e0-B8FC-AC1667EBCBE1}">
-                <a14:hiddenEffects xmlns:a14="http://schemas.microsoft.com/office/drawing/2010/main" xmlns="">
+                <a14:hiddenEffects xmlns="" xmlns:a14="http://schemas.microsoft.com/office/drawing/2010/main">
                   <a:effectLst>
                     <a:outerShdw blurRad="63500" dist="38099" dir="2700000" algn="ctr" rotWithShape="0">
                       <a:schemeClr val="bg2">
@@ -13996,7 +14009,7 @@
             <a:effectLst/>
             <a:extLst>
               <a:ext uri="{91240B29-F687-4f45-9708-019B960494DF}">
-                <a14:hiddenLine xmlns:a14="http://schemas.microsoft.com/office/drawing/2010/main" xmlns="" w="9525">
+                <a14:hiddenLine xmlns="" xmlns:a14="http://schemas.microsoft.com/office/drawing/2010/main" w="9525">
                   <a:solidFill>
                     <a:schemeClr val="tx1"/>
                   </a:solidFill>
@@ -14006,7 +14019,7 @@
                 </a14:hiddenLine>
               </a:ext>
               <a:ext uri="{AF507438-7753-43e0-B8FC-AC1667EBCBE1}">
-                <a14:hiddenEffects xmlns:a14="http://schemas.microsoft.com/office/drawing/2010/main" xmlns="">
+                <a14:hiddenEffects xmlns="" xmlns:a14="http://schemas.microsoft.com/office/drawing/2010/main">
                   <a:effectLst>
                     <a:outerShdw blurRad="63500" dist="38099" dir="2700000" algn="ctr" rotWithShape="0">
                       <a:schemeClr val="bg2">
@@ -14179,14 +14192,14 @@
           <a:effectLst/>
           <a:extLst>
             <a:ext uri="{909E8E84-426E-40dd-AFC4-6F175D3DCCD1}">
-              <a14:hiddenFill xmlns:a14="http://schemas.microsoft.com/office/drawing/2010/main" xmlns="">
+              <a14:hiddenFill xmlns="" xmlns:a14="http://schemas.microsoft.com/office/drawing/2010/main">
                 <a:solidFill>
                   <a:schemeClr val="accent1"/>
                 </a:solidFill>
               </a14:hiddenFill>
             </a:ext>
             <a:ext uri="{91240B29-F687-4f45-9708-019B960494DF}">
-              <a14:hiddenLine xmlns:a14="http://schemas.microsoft.com/office/drawing/2010/main" xmlns="" w="9525">
+              <a14:hiddenLine xmlns="" xmlns:a14="http://schemas.microsoft.com/office/drawing/2010/main" w="9525">
                 <a:solidFill>
                   <a:schemeClr val="tx1"/>
                 </a:solidFill>
@@ -14196,7 +14209,7 @@
               </a14:hiddenLine>
             </a:ext>
             <a:ext uri="{AF507438-7753-43e0-B8FC-AC1667EBCBE1}">
-              <a14:hiddenEffects xmlns:a14="http://schemas.microsoft.com/office/drawing/2010/main" xmlns="">
+              <a14:hiddenEffects xmlns="" xmlns:a14="http://schemas.microsoft.com/office/drawing/2010/main">
                 <a:effectLst>
                   <a:outerShdw blurRad="63500" dist="38099" dir="2700000" algn="ctr" rotWithShape="0">
                     <a:schemeClr val="bg2">
@@ -14353,14 +14366,14 @@
           <a:effectLst/>
           <a:extLst>
             <a:ext uri="{909E8E84-426E-40dd-AFC4-6F175D3DCCD1}">
-              <a14:hiddenFill xmlns:a14="http://schemas.microsoft.com/office/drawing/2010/main" xmlns="">
+              <a14:hiddenFill xmlns="" xmlns:a14="http://schemas.microsoft.com/office/drawing/2010/main">
                 <a:solidFill>
                   <a:srgbClr val="FFFF99"/>
                 </a:solidFill>
               </a14:hiddenFill>
             </a:ext>
             <a:ext uri="{91240B29-F687-4f45-9708-019B960494DF}">
-              <a14:hiddenLine xmlns:a14="http://schemas.microsoft.com/office/drawing/2010/main" xmlns="" w="12700">
+              <a14:hiddenLine xmlns="" xmlns:a14="http://schemas.microsoft.com/office/drawing/2010/main" w="12700">
                 <a:solidFill>
                   <a:schemeClr val="tx1"/>
                 </a:solidFill>
@@ -14370,7 +14383,7 @@
               </a14:hiddenLine>
             </a:ext>
             <a:ext uri="{AF507438-7753-43e0-B8FC-AC1667EBCBE1}">
-              <a14:hiddenEffects xmlns:a14="http://schemas.microsoft.com/office/drawing/2010/main" xmlns="">
+              <a14:hiddenEffects xmlns="" xmlns:a14="http://schemas.microsoft.com/office/drawing/2010/main">
                 <a:effectLst>
                   <a:outerShdw blurRad="63500" dist="38099" dir="2700000" algn="ctr" rotWithShape="0">
                     <a:schemeClr val="bg2">
@@ -14422,14 +14435,14 @@
           <a:effectLst/>
           <a:extLst>
             <a:ext uri="{909E8E84-426E-40dd-AFC4-6F175D3DCCD1}">
-              <a14:hiddenFill xmlns:a14="http://schemas.microsoft.com/office/drawing/2010/main" xmlns="">
+              <a14:hiddenFill xmlns="" xmlns:a14="http://schemas.microsoft.com/office/drawing/2010/main">
                 <a:solidFill>
                   <a:schemeClr val="accent1"/>
                 </a:solidFill>
               </a14:hiddenFill>
             </a:ext>
             <a:ext uri="{91240B29-F687-4f45-9708-019B960494DF}">
-              <a14:hiddenLine xmlns:a14="http://schemas.microsoft.com/office/drawing/2010/main" xmlns="" w="9525">
+              <a14:hiddenLine xmlns="" xmlns:a14="http://schemas.microsoft.com/office/drawing/2010/main" w="9525">
                 <a:solidFill>
                   <a:schemeClr val="tx1"/>
                 </a:solidFill>
@@ -14439,7 +14452,7 @@
               </a14:hiddenLine>
             </a:ext>
             <a:ext uri="{AF507438-7753-43e0-B8FC-AC1667EBCBE1}">
-              <a14:hiddenEffects xmlns:a14="http://schemas.microsoft.com/office/drawing/2010/main" xmlns="">
+              <a14:hiddenEffects xmlns="" xmlns:a14="http://schemas.microsoft.com/office/drawing/2010/main">
                 <a:effectLst>
                   <a:outerShdw blurRad="63500" dist="38099" dir="2700000" algn="ctr" rotWithShape="0">
                     <a:schemeClr val="bg2">
@@ -14601,12 +14614,12 @@
           <a:effectLst/>
           <a:extLst>
             <a:ext uri="{909E8E84-426E-40dd-AFC4-6F175D3DCCD1}">
-              <a14:hiddenFill xmlns:a14="http://schemas.microsoft.com/office/drawing/2010/main" xmlns="">
+              <a14:hiddenFill xmlns="" xmlns:a14="http://schemas.microsoft.com/office/drawing/2010/main">
                 <a:noFill/>
               </a14:hiddenFill>
             </a:ext>
             <a:ext uri="{AF507438-7753-43e0-B8FC-AC1667EBCBE1}">
-              <a14:hiddenEffects xmlns:a14="http://schemas.microsoft.com/office/drawing/2010/main" xmlns="">
+              <a14:hiddenEffects xmlns="" xmlns:a14="http://schemas.microsoft.com/office/drawing/2010/main">
                 <a:effectLst>
                   <a:outerShdw blurRad="63500" dist="38099" dir="2700000" algn="ctr" rotWithShape="0">
                     <a:srgbClr val="000000">
@@ -14649,14 +14662,14 @@
           <a:effectLst/>
           <a:extLst>
             <a:ext uri="{909E8E84-426E-40dd-AFC4-6F175D3DCCD1}">
-              <a14:hiddenFill xmlns:a14="http://schemas.microsoft.com/office/drawing/2010/main" xmlns="">
+              <a14:hiddenFill xmlns="" xmlns:a14="http://schemas.microsoft.com/office/drawing/2010/main">
                 <a:solidFill>
                   <a:schemeClr val="bg2"/>
                 </a:solidFill>
               </a14:hiddenFill>
             </a:ext>
             <a:ext uri="{91240B29-F687-4f45-9708-019B960494DF}">
-              <a14:hiddenLine xmlns:a14="http://schemas.microsoft.com/office/drawing/2010/main" xmlns="" w="12700">
+              <a14:hiddenLine xmlns="" xmlns:a14="http://schemas.microsoft.com/office/drawing/2010/main" w="12700">
                 <a:solidFill>
                   <a:schemeClr val="tx1"/>
                 </a:solidFill>
@@ -14666,7 +14679,7 @@
               </a14:hiddenLine>
             </a:ext>
             <a:ext uri="{AF507438-7753-43e0-B8FC-AC1667EBCBE1}">
-              <a14:hiddenEffects xmlns:a14="http://schemas.microsoft.com/office/drawing/2010/main" xmlns="">
+              <a14:hiddenEffects xmlns="" xmlns:a14="http://schemas.microsoft.com/office/drawing/2010/main">
                 <a:effectLst>
                   <a:outerShdw blurRad="63500" dist="38099" dir="2700000" algn="ctr" rotWithShape="0">
                     <a:schemeClr val="bg2">
@@ -14714,14 +14727,14 @@
           <a:effectLst/>
           <a:extLst>
             <a:ext uri="{909E8E84-426E-40dd-AFC4-6F175D3DCCD1}">
-              <a14:hiddenFill xmlns:a14="http://schemas.microsoft.com/office/drawing/2010/main" xmlns="">
+              <a14:hiddenFill xmlns="" xmlns:a14="http://schemas.microsoft.com/office/drawing/2010/main">
                 <a:solidFill>
                   <a:srgbClr val="FFFFFF"/>
                 </a:solidFill>
               </a14:hiddenFill>
             </a:ext>
             <a:ext uri="{91240B29-F687-4f45-9708-019B960494DF}">
-              <a14:hiddenLine xmlns:a14="http://schemas.microsoft.com/office/drawing/2010/main" xmlns="" w="9525">
+              <a14:hiddenLine xmlns="" xmlns:a14="http://schemas.microsoft.com/office/drawing/2010/main" w="9525">
                 <a:solidFill>
                   <a:schemeClr val="tx1"/>
                 </a:solidFill>
@@ -14731,7 +14744,7 @@
               </a14:hiddenLine>
             </a:ext>
             <a:ext uri="{AF507438-7753-43e0-B8FC-AC1667EBCBE1}">
-              <a14:hiddenEffects xmlns:a14="http://schemas.microsoft.com/office/drawing/2010/main" xmlns="">
+              <a14:hiddenEffects xmlns="" xmlns:a14="http://schemas.microsoft.com/office/drawing/2010/main">
                 <a:effectLst>
                   <a:outerShdw blurRad="63500" dist="38099" dir="2700000" algn="ctr" rotWithShape="0">
                     <a:srgbClr val="000000">
@@ -14784,14 +14797,14 @@
           <a:effectLst/>
           <a:extLst>
             <a:ext uri="{909E8E84-426E-40dd-AFC4-6F175D3DCCD1}">
-              <a14:hiddenFill xmlns:a14="http://schemas.microsoft.com/office/drawing/2010/main" xmlns="">
+              <a14:hiddenFill xmlns="" xmlns:a14="http://schemas.microsoft.com/office/drawing/2010/main">
                 <a:solidFill>
                   <a:srgbClr val="FFFFFF"/>
                 </a:solidFill>
               </a14:hiddenFill>
             </a:ext>
             <a:ext uri="{91240B29-F687-4f45-9708-019B960494DF}">
-              <a14:hiddenLine xmlns:a14="http://schemas.microsoft.com/office/drawing/2010/main" xmlns="" w="9525">
+              <a14:hiddenLine xmlns="" xmlns:a14="http://schemas.microsoft.com/office/drawing/2010/main" w="9525">
                 <a:solidFill>
                   <a:schemeClr val="tx1"/>
                 </a:solidFill>
@@ -14801,7 +14814,7 @@
               </a14:hiddenLine>
             </a:ext>
             <a:ext uri="{AF507438-7753-43e0-B8FC-AC1667EBCBE1}">
-              <a14:hiddenEffects xmlns:a14="http://schemas.microsoft.com/office/drawing/2010/main" xmlns="">
+              <a14:hiddenEffects xmlns="" xmlns:a14="http://schemas.microsoft.com/office/drawing/2010/main">
                 <a:effectLst>
                   <a:outerShdw blurRad="63500" dist="38099" dir="2700000" algn="ctr" rotWithShape="0">
                     <a:srgbClr val="000000">
